--- a/submission/Curb-Cut.pptx
+++ b/submission/Curb-Cut.pptx
@@ -1492,7 +1492,7 @@
           <a:p>
             <a:r>
               <a:rPr lang="en-US" dirty="0"/>
-              <a:t>Read it once. Do not explain it. This is a real person, not a persona.</a:t>
+              <a:t>Read it once. Do not explain it. This is a real person, not a persona. If asked why a 2021 quote: it is the most recent open-access study with verifiable participant testimony, and the gap it describes has been measured twice since and has not closed.</a:t>
             </a:r>
             <a:endParaRPr lang="en-US" dirty="0"/>
           </a:p>
@@ -10679,7 +10679,7 @@
         <p:spPr>
           <a:xfrm>
             <a:off x="777240" y="2048256"/>
-            <a:ext cx="10424160" cy="2743200"/>
+            <a:ext cx="10424160" cy="2560320"/>
           </a:xfrm>
           <a:prstGeom prst="rect">
             <a:avLst/>
@@ -10720,8 +10720,8 @@
         </p:nvSpPr>
         <p:spPr>
           <a:xfrm>
-            <a:off x="777240" y="5120640"/>
-            <a:ext cx="10424160" cy="822960"/>
+            <a:off x="777240" y="4892040"/>
+            <a:ext cx="10424160" cy="640080"/>
           </a:xfrm>
           <a:prstGeom prst="rect">
             <a:avLst/>
@@ -10765,6 +10765,45 @@
               <a:t>Proceedings of the ACM on Human-Computer Interaction, 2021.</a:t>
             </a:r>
             <a:endParaRPr lang="en-US" sz="1200" dirty="0"/>
+          </a:p>
+        </p:txBody>
+      </p:sp>
+      <p:sp>
+        <p:nvSpPr>
+          <p:cNvPr id="5" name="Text 3"/>
+          <p:cNvSpPr txBox="1"/>
+          <p:nvPr/>
+        </p:nvSpPr>
+        <p:spPr>
+          <a:xfrm>
+            <a:off x="777240" y="5623560"/>
+            <a:ext cx="10424160" cy="640080"/>
+          </a:xfrm>
+          <a:prstGeom prst="rect">
+            <a:avLst/>
+          </a:prstGeom>
+          <a:noFill/>
+          <a:ln/>
+        </p:spPr>
+        <p:txBody>
+          <a:bodyPr wrap="square" lIns="0" tIns="0" rIns="0" bIns="0" rtlCol="0" anchor="ctr"/>
+          <a:lstStyle/>
+          <a:p>
+            <a:pPr indent="0" marL="0">
+              <a:buNone/>
+            </a:pPr>
+            <a:r>
+              <a:rPr lang="en-US" sz="1350" i="1" dirty="0">
+                <a:solidFill>
+                  <a:srgbClr val="E8C87A"/>
+                </a:solidFill>
+                <a:latin typeface="Cambria" pitchFamily="34" charset="0"/>
+                <a:ea typeface="Cambria" pitchFamily="34" charset="-122"/>
+                <a:cs typeface="Cambria" pitchFamily="34" charset="-120"/>
+              </a:rPr>
+              <a:t>Recorded in 2021. Statistics Canada measured the same gap in 2022. The US Bureau of Labor Statistics measured it again in 2025. It has not closed.</a:t>
+            </a:r>
+            <a:endParaRPr lang="en-US" sz="1350" dirty="0"/>
           </a:p>
         </p:txBody>
       </p:sp>
@@ -14183,7 +14222,7 @@
         <p:spPr>
           <a:xfrm>
             <a:off x="777240" y="2048256"/>
-            <a:ext cx="10424160" cy="2743200"/>
+            <a:ext cx="10424160" cy="2560320"/>
           </a:xfrm>
           <a:prstGeom prst="rect">
             <a:avLst/>
@@ -14224,8 +14263,8 @@
         </p:nvSpPr>
         <p:spPr>
           <a:xfrm>
-            <a:off x="777240" y="5120640"/>
-            <a:ext cx="10424160" cy="822960"/>
+            <a:off x="777240" y="4892040"/>
+            <a:ext cx="10424160" cy="640080"/>
           </a:xfrm>
           <a:prstGeom prst="rect">
             <a:avLst/>
@@ -14269,6 +14308,45 @@
               <a:t>Proceedings of the ACM on Human-Computer Interaction, 2021.</a:t>
             </a:r>
             <a:endParaRPr lang="en-US" sz="1200" dirty="0"/>
+          </a:p>
+        </p:txBody>
+      </p:sp>
+      <p:sp>
+        <p:nvSpPr>
+          <p:cNvPr id="5" name="Text 3"/>
+          <p:cNvSpPr txBox="1"/>
+          <p:nvPr/>
+        </p:nvSpPr>
+        <p:spPr>
+          <a:xfrm>
+            <a:off x="777240" y="5623560"/>
+            <a:ext cx="10424160" cy="640080"/>
+          </a:xfrm>
+          <a:prstGeom prst="rect">
+            <a:avLst/>
+          </a:prstGeom>
+          <a:noFill/>
+          <a:ln/>
+        </p:spPr>
+        <p:txBody>
+          <a:bodyPr wrap="square" lIns="0" tIns="0" rIns="0" bIns="0" rtlCol="0" anchor="ctr"/>
+          <a:lstStyle/>
+          <a:p>
+            <a:pPr indent="0" marL="0">
+              <a:buNone/>
+            </a:pPr>
+            <a:r>
+              <a:rPr lang="en-US" sz="1350" i="1" dirty="0">
+                <a:solidFill>
+                  <a:srgbClr val="E8C87A"/>
+                </a:solidFill>
+                <a:latin typeface="Cambria" pitchFamily="34" charset="0"/>
+                <a:ea typeface="Cambria" pitchFamily="34" charset="-122"/>
+                <a:cs typeface="Cambria" pitchFamily="34" charset="-120"/>
+              </a:rPr>
+              <a:t>Five years on, 35.4% of employed Canadians with disabilities still have an accommodation need that went unmet.</a:t>
+            </a:r>
+            <a:endParaRPr lang="en-US" sz="1350" dirty="0"/>
           </a:p>
         </p:txBody>
       </p:sp>

--- a/submission/Curb-Cut.pptx
+++ b/submission/Curb-Cut.pptx
@@ -1492,7 +1492,7 @@
           <a:p>
             <a:r>
               <a:rPr lang="en-US" dirty="0"/>
-              <a:t>Read it once. Do not explain it. This is a real person, not a persona. If asked why a 2021 quote: it is the most recent open-access study with verifiable participant testimony, and the gap it describes has been measured twice since and has not closed.</a:t>
+              <a:t>Say the first line, then pause. Let people actually remember. Do not rush to the second line. Nobody needs a citation for this one because everybody has lived it.</a:t>
             </a:r>
             <a:endParaRPr lang="en-US" dirty="0"/>
           </a:p>
@@ -2284,7 +2284,7 @@
           <a:p>
             <a:r>
               <a:rPr lang="en-US" dirty="0"/>
-              <a:t>This is the sentence the standing preference exists for. Call back to it later.</a:t>
+              <a:t>This is the sentence the standing preference exists for. Call back to it later. If asked about the date: the gap it describes was measured again by Statistics Canada in 2022 and by the US Bureau of Labor Statistics in 2025, and it has not closed.</a:t>
             </a:r>
             <a:endParaRPr lang="en-US" dirty="0"/>
           </a:p>
@@ -10639,34 +10639,34 @@
         </p:nvSpPr>
         <p:spPr>
           <a:xfrm>
-            <a:off x="612648" y="658368"/>
-            <a:ext cx="1371600" cy="1325880"/>
-          </a:xfrm>
-          <a:prstGeom prst="rect">
-            <a:avLst/>
-          </a:prstGeom>
-          <a:noFill/>
-          <a:ln/>
-        </p:spPr>
-        <p:txBody>
-          <a:bodyPr wrap="square" lIns="0" tIns="0" rIns="0" bIns="0" rtlCol="0" anchor="ctr"/>
-          <a:lstStyle/>
-          <a:p>
-            <a:pPr indent="0" marL="0">
-              <a:buNone/>
-            </a:pPr>
-            <a:r>
-              <a:rPr lang="en-US" sz="8800" dirty="0">
-                <a:solidFill>
-                  <a:srgbClr val="E8C87A"/>
+            <a:off x="777240" y="1371600"/>
+            <a:ext cx="10424160" cy="822960"/>
+          </a:xfrm>
+          <a:prstGeom prst="rect">
+            <a:avLst/>
+          </a:prstGeom>
+          <a:noFill/>
+          <a:ln/>
+        </p:spPr>
+        <p:txBody>
+          <a:bodyPr wrap="square" lIns="0" tIns="0" rIns="0" bIns="0" rtlCol="0" anchor="ctr"/>
+          <a:lstStyle/>
+          <a:p>
+            <a:pPr indent="0" marL="0">
+              <a:buNone/>
+            </a:pPr>
+            <a:r>
+              <a:rPr lang="en-US" sz="4200" b="1" dirty="0">
+                <a:solidFill>
+                  <a:srgbClr val="F7F5EF"/>
                 </a:solidFill>
                 <a:latin typeface="Cambria" pitchFamily="34" charset="0"/>
                 <a:ea typeface="Cambria" pitchFamily="34" charset="-122"/>
                 <a:cs typeface="Cambria" pitchFamily="34" charset="-120"/>
               </a:rPr>
-              <a:t>“</a:t>
-            </a:r>
-            <a:endParaRPr lang="en-US" sz="8800" dirty="0"/>
+              <a:t>You have already done this.</a:t>
+            </a:r>
+            <a:endParaRPr lang="en-US" sz="4200" dirty="0"/>
           </a:p>
         </p:txBody>
       </p:sp>
@@ -10678,66 +10678,141 @@
         </p:nvSpPr>
         <p:spPr>
           <a:xfrm>
-            <a:off x="777240" y="2048256"/>
-            <a:ext cx="10424160" cy="2560320"/>
-          </a:xfrm>
-          <a:prstGeom prst="rect">
-            <a:avLst/>
-          </a:prstGeom>
-          <a:noFill/>
-          <a:ln/>
-        </p:spPr>
-        <p:txBody>
-          <a:bodyPr wrap="square" lIns="0" tIns="0" rIns="0" bIns="0" rtlCol="0" anchor="ctr"/>
-          <a:lstStyle/>
-          <a:p>
-            <a:pPr indent="0" marL="0">
-              <a:lnSpc>
-                <a:spcPct val="120000"/>
-              </a:lnSpc>
-              <a:buNone/>
-            </a:pPr>
-            <a:r>
-              <a:rPr lang="en-US" sz="3200" i="1" dirty="0">
-                <a:solidFill>
-                  <a:srgbClr val="F7F5EF"/>
+            <a:off x="777240" y="2514600"/>
+            <a:ext cx="9966960" cy="914400"/>
+          </a:xfrm>
+          <a:prstGeom prst="rect">
+            <a:avLst/>
+          </a:prstGeom>
+          <a:noFill/>
+          <a:ln/>
+        </p:spPr>
+        <p:txBody>
+          <a:bodyPr wrap="square" lIns="0" tIns="0" rIns="0" bIns="0" rtlCol="0" anchor="ctr"/>
+          <a:lstStyle/>
+          <a:p>
+            <a:pPr indent="0" marL="0">
+              <a:buNone/>
+            </a:pPr>
+            <a:r>
+              <a:rPr lang="en-US" sz="2100" dirty="0">
+                <a:solidFill>
+                  <a:srgbClr val="D8DAD6"/>
+                </a:solidFill>
+                <a:latin typeface="Calibri" pitchFamily="34" charset="0"/>
+                <a:ea typeface="Calibri" pitchFamily="34" charset="-122"/>
+                <a:cs typeface="Calibri" pitchFamily="34" charset="-120"/>
+              </a:rPr>
+              <a:t>Think of the last time something at work was quietly hard. The chair. The light. A meeting at the wrong hour for your body.</a:t>
+            </a:r>
+            <a:endParaRPr lang="en-US" sz="2100" dirty="0"/>
+          </a:p>
+        </p:txBody>
+      </p:sp>
+      <p:sp>
+        <p:nvSpPr>
+          <p:cNvPr id="4" name="Text 2"/>
+          <p:cNvSpPr txBox="1"/>
+          <p:nvPr/>
+        </p:nvSpPr>
+        <p:spPr>
+          <a:xfrm>
+            <a:off x="777240" y="3611880"/>
+            <a:ext cx="9966960" cy="1005840"/>
+          </a:xfrm>
+          <a:prstGeom prst="rect">
+            <a:avLst/>
+          </a:prstGeom>
+          <a:noFill/>
+          <a:ln/>
+        </p:spPr>
+        <p:txBody>
+          <a:bodyPr wrap="square" lIns="0" tIns="0" rIns="0" bIns="0" rtlCol="0" anchor="ctr"/>
+          <a:lstStyle/>
+          <a:p>
+            <a:pPr indent="0" marL="0">
+              <a:buNone/>
+            </a:pPr>
+            <a:r>
+              <a:rPr lang="en-US" sz="2100" dirty="0">
+                <a:solidFill>
+                  <a:srgbClr val="D8DAD6"/>
+                </a:solidFill>
+                <a:latin typeface="Calibri" pitchFamily="34" charset="0"/>
+                <a:ea typeface="Calibri" pitchFamily="34" charset="-122"/>
+                <a:cs typeface="Calibri" pitchFamily="34" charset="-120"/>
+              </a:rPr>
+              <a:t>You worked out what it would take to ask. Who you would have to tell. How it would sound. And you decided it was not worth the conversation.</a:t>
+            </a:r>
+            <a:endParaRPr lang="en-US" sz="2100" dirty="0"/>
+          </a:p>
+        </p:txBody>
+      </p:sp>
+      <p:sp>
+        <p:nvSpPr>
+          <p:cNvPr id="5" name="Text 3"/>
+          <p:cNvSpPr txBox="1"/>
+          <p:nvPr/>
+        </p:nvSpPr>
+        <p:spPr>
+          <a:xfrm>
+            <a:off x="777240" y="4892040"/>
+            <a:ext cx="9966960" cy="731520"/>
+          </a:xfrm>
+          <a:prstGeom prst="rect">
+            <a:avLst/>
+          </a:prstGeom>
+          <a:noFill/>
+          <a:ln/>
+        </p:spPr>
+        <p:txBody>
+          <a:bodyPr wrap="square" lIns="0" tIns="0" rIns="0" bIns="0" rtlCol="0" anchor="ctr"/>
+          <a:lstStyle/>
+          <a:p>
+            <a:pPr indent="0" marL="0">
+              <a:buNone/>
+            </a:pPr>
+            <a:r>
+              <a:rPr lang="en-US" sz="2600" i="1" dirty="0">
+                <a:solidFill>
+                  <a:srgbClr val="E8C87A"/>
                 </a:solidFill>
                 <a:latin typeface="Cambria" pitchFamily="34" charset="0"/>
                 <a:ea typeface="Cambria" pitchFamily="34" charset="-122"/>
                 <a:cs typeface="Cambria" pitchFamily="34" charset="-120"/>
               </a:rPr>
-              <a:t>I wish we had a percent sick number on our forehead, so others could have something tangible to understand what we are going through.</a:t>
-            </a:r>
-            <a:endParaRPr lang="en-US" sz="3200" dirty="0"/>
-          </a:p>
-        </p:txBody>
-      </p:sp>
-      <p:sp>
-        <p:nvSpPr>
-          <p:cNvPr id="4" name="Text 2"/>
-          <p:cNvSpPr txBox="1"/>
-          <p:nvPr/>
-        </p:nvSpPr>
-        <p:spPr>
-          <a:xfrm>
-            <a:off x="777240" y="4892040"/>
-            <a:ext cx="10424160" cy="640080"/>
-          </a:xfrm>
-          <a:prstGeom prst="rect">
-            <a:avLst/>
-          </a:prstGeom>
-          <a:noFill/>
-          <a:ln/>
-        </p:spPr>
-        <p:txBody>
-          <a:bodyPr wrap="square" lIns="0" tIns="0" rIns="0" bIns="0" rtlCol="0" anchor="ctr"/>
-          <a:lstStyle/>
-          <a:p>
-            <a:pPr indent="0" marL="0">
-              <a:buNone/>
-            </a:pPr>
-            <a:r>
-              <a:rPr lang="en-US" sz="1200" dirty="0">
+              <a:t>Now make it permanent, and make the conversation about your body.</a:t>
+            </a:r>
+            <a:endParaRPr lang="en-US" sz="2600" dirty="0"/>
+          </a:p>
+        </p:txBody>
+      </p:sp>
+      <p:sp>
+        <p:nvSpPr>
+          <p:cNvPr id="6" name="Text 4"/>
+          <p:cNvSpPr txBox="1"/>
+          <p:nvPr/>
+        </p:nvSpPr>
+        <p:spPr>
+          <a:xfrm>
+            <a:off x="777240" y="5897880"/>
+            <a:ext cx="10058400" cy="457200"/>
+          </a:xfrm>
+          <a:prstGeom prst="rect">
+            <a:avLst/>
+          </a:prstGeom>
+          <a:noFill/>
+          <a:ln/>
+        </p:spPr>
+        <p:txBody>
+          <a:bodyPr wrap="square" lIns="0" tIns="0" rIns="0" bIns="0" rtlCol="0" anchor="ctr"/>
+          <a:lstStyle/>
+          <a:p>
+            <a:pPr indent="0" marL="0">
+              <a:buNone/>
+            </a:pPr>
+            <a:r>
+              <a:rPr lang="en-US" sz="1250" dirty="0">
                 <a:solidFill>
                   <a:srgbClr val="A9B0B6"/>
                 </a:solidFill>
@@ -10745,65 +10820,9 @@
                 <a:ea typeface="Courier New" pitchFamily="34" charset="-122"/>
                 <a:cs typeface="Courier New" pitchFamily="34" charset="-120"/>
               </a:rPr>
-              <a:t>A participant, quoted in Ganesh and Lazar, "The Work of Workplace Disclosure",</a:t>
-            </a:r>
-            <a:endParaRPr lang="en-US" sz="1200" dirty="0"/>
-          </a:p>
-          <a:p>
-            <a:pPr indent="0" marL="0">
-              <a:buNone/>
-            </a:pPr>
-            <a:r>
-              <a:rPr lang="en-US" sz="1200" dirty="0">
-                <a:solidFill>
-                  <a:srgbClr val="A9B0B6"/>
-                </a:solidFill>
-                <a:latin typeface="Courier New" pitchFamily="34" charset="0"/>
-                <a:ea typeface="Courier New" pitchFamily="34" charset="-122"/>
-                <a:cs typeface="Courier New" pitchFamily="34" charset="-120"/>
-              </a:rPr>
-              <a:t>Proceedings of the ACM on Human-Computer Interaction, 2021.</a:t>
-            </a:r>
-            <a:endParaRPr lang="en-US" sz="1200" dirty="0"/>
-          </a:p>
-        </p:txBody>
-      </p:sp>
-      <p:sp>
-        <p:nvSpPr>
-          <p:cNvPr id="5" name="Text 3"/>
-          <p:cNvSpPr txBox="1"/>
-          <p:nvPr/>
-        </p:nvSpPr>
-        <p:spPr>
-          <a:xfrm>
-            <a:off x="777240" y="5623560"/>
-            <a:ext cx="10424160" cy="640080"/>
-          </a:xfrm>
-          <a:prstGeom prst="rect">
-            <a:avLst/>
-          </a:prstGeom>
-          <a:noFill/>
-          <a:ln/>
-        </p:spPr>
-        <p:txBody>
-          <a:bodyPr wrap="square" lIns="0" tIns="0" rIns="0" bIns="0" rtlCol="0" anchor="ctr"/>
-          <a:lstStyle/>
-          <a:p>
-            <a:pPr indent="0" marL="0">
-              <a:buNone/>
-            </a:pPr>
-            <a:r>
-              <a:rPr lang="en-US" sz="1350" i="1" dirty="0">
-                <a:solidFill>
-                  <a:srgbClr val="E8C87A"/>
-                </a:solidFill>
-                <a:latin typeface="Cambria" pitchFamily="34" charset="0"/>
-                <a:ea typeface="Cambria" pitchFamily="34" charset="-122"/>
-                <a:cs typeface="Cambria" pitchFamily="34" charset="-120"/>
-              </a:rPr>
-              <a:t>Recorded in 2021. Statistics Canada measured the same gap in 2022. The US Bureau of Labor Statistics measured it again in 2025. It has not closed.</a:t>
-            </a:r>
-            <a:endParaRPr lang="en-US" sz="1350" dirty="0"/>
+              <a:t>That is the whole problem. Everyone in this room has felt the small version of it.</a:t>
+            </a:r>
+            <a:endParaRPr lang="en-US" sz="1250" dirty="0"/>
           </a:p>
         </p:txBody>
       </p:sp>
@@ -12188,7 +12207,7 @@
                 <a:ea typeface="Cambria" pitchFamily="34" charset="-122"/>
                 <a:cs typeface="Cambria" pitchFamily="34" charset="-120"/>
               </a:rPr>
-              <a:t>There is still no percent sick number.</a:t>
+              <a:t>You already know what it costs to ask.</a:t>
             </a:r>
             <a:endParaRPr lang="en-US" sz="3800" dirty="0"/>
           </a:p>
@@ -12227,7 +12246,7 @@
                 <a:ea typeface="Calibri" pitchFamily="34" charset="-122"/>
                 <a:cs typeface="Calibri" pitchFamily="34" charset="-120"/>
               </a:rPr>
-              <a:t>There does not need to be. Nobody should have to prove anything to get a chair that does not hurt, an hour moved, or captions turned on.</a:t>
+              <a:t>You felt it in the small version, over a chair or an hour. Nobody should have to prove anything to get those, and nobody should have to spend themselves asking.</a:t>
             </a:r>
             <a:endParaRPr lang="en-US" sz="1800" dirty="0"/>
           </a:p>
@@ -12488,7 +12507,7 @@
                 <a:ea typeface="Courier New" pitchFamily="34" charset="-122"/>
                 <a:cs typeface="Courier New" pitchFamily="34" charset="-120"/>
               </a:rPr>
-              <a:t>WHAT THAT SENTENCE IS ASKING FOR</a:t>
+              <a:t>WHAT YOU DECIDED NOT TO DO</a:t>
             </a:r>
             <a:endParaRPr lang="en-US" sz="950" dirty="0"/>
           </a:p>
@@ -12527,7 +12546,7 @@
                 <a:ea typeface="Cambria" pitchFamily="34" charset="-122"/>
                 <a:cs typeface="Cambria" pitchFamily="34" charset="-120"/>
               </a:rPr>
-              <a:t>To be believed without having to prove it.</a:t>
+              <a:t>Now imagine the form was mandatory.</a:t>
             </a:r>
             <a:endParaRPr lang="en-US" sz="3300" dirty="0"/>
           </a:p>
@@ -12569,7 +12588,7 @@
                 <a:ea typeface="Calibri" pitchFamily="34" charset="-122"/>
                 <a:cs typeface="Calibri" pitchFamily="34" charset="-120"/>
               </a:rPr>
-              <a:t>She is not asking for sympathy.</a:t>
+              <a:t>You did that calculation privately and moved on.</a:t>
             </a:r>
             <a:endParaRPr lang="en-US" sz="1600" dirty="0"/>
           </a:p>
@@ -12589,7 +12608,7 @@
                 <a:ea typeface="Calibri" pitchFamily="34" charset="-122"/>
                 <a:cs typeface="Calibri" pitchFamily="34" charset="-120"/>
               </a:rPr>
-              <a:t>She is asking for a way to communicate one fact about her body without spending herself doing it, to people who will not believe her without evidence she should never have had to hand over.</a:t>
+              <a:t>For roughly three in ten people at work, that calculation is not occasional. It is a standing condition of the job, and the price of getting it wrong is not an awkward moment. It is being seen as difficult, or fragile, or not worth staffing.</a:t>
             </a:r>
             <a:endParaRPr lang="en-US" sz="1600" dirty="0"/>
           </a:p>
@@ -12609,7 +12628,7 @@
                 <a:ea typeface="Calibri" pitchFamily="34" charset="-122"/>
                 <a:cs typeface="Calibri" pitchFamily="34" charset="-120"/>
               </a:rPr>
-              <a:t>There is no percent sick number. What there is, in almost every workplace, is a form.</a:t>
+              <a:t>And the way through is almost never a conversation. It is this.</a:t>
             </a:r>
             <a:endParaRPr lang="en-US" sz="1600" dirty="0"/>
           </a:p>
@@ -14288,7 +14307,7 @@
                 <a:ea typeface="Courier New" pitchFamily="34" charset="-122"/>
                 <a:cs typeface="Courier New" pitchFamily="34" charset="-120"/>
               </a:rPr>
-              <a:t>A participant, quoted in Ganesh and Lazar, "The Work of Workplace Disclosure",</a:t>
+              <a:t>Interview participant, workplace disclosure study, Proceedings of the ACM on</a:t>
             </a:r>
             <a:endParaRPr lang="en-US" sz="1200" dirty="0"/>
           </a:p>
@@ -14305,7 +14324,7 @@
                 <a:ea typeface="Courier New" pitchFamily="34" charset="-122"/>
                 <a:cs typeface="Courier New" pitchFamily="34" charset="-120"/>
               </a:rPr>
-              <a:t>Proceedings of the ACM on Human-Computer Interaction, 2021.</a:t>
+              <a:t>Human-Computer Interaction. One of eight people with invisible chronic conditions.</a:t>
             </a:r>
             <a:endParaRPr lang="en-US" sz="1200" dirty="0"/>
           </a:p>
@@ -14344,7 +14363,7 @@
                 <a:ea typeface="Cambria" pitchFamily="34" charset="-122"/>
                 <a:cs typeface="Cambria" pitchFamily="34" charset="-120"/>
               </a:rPr>
-              <a:t>Five years on, 35.4% of employed Canadians with disabilities still have an accommodation need that went unmet.</a:t>
+              <a:t>Measured again in 2022 and 2025. It has not closed.</a:t>
             </a:r>
             <a:endParaRPr lang="en-US" sz="1350" dirty="0"/>
           </a:p>

--- a/submission/Curb-Cut.pptx
+++ b/submission/Curb-Cut.pptx
@@ -28,9 +28,10 @@
     <p:sldId id="276" r:id="rId22"/>
     <p:sldId id="277" r:id="rId23"/>
     <p:sldId id="278" r:id="rId24"/>
+    <p:sldId id="279" r:id="rId25"/>
   </p:sldIdLst>
   <p:notesMasterIdLst>
-    <p:notesMasterId r:id="rId25"/>
+    <p:notesMasterId r:id="rId26"/>
   </p:notesMasterIdLst>
   <p:sldSz cx="12192000" cy="6858000"/>
   <p:notesSz cx="6858000" cy="12192000"/>
@@ -1844,7 +1845,7 @@
           <a:p>
             <a:r>
               <a:rPr lang="en-US" dirty="0"/>
-              <a:t>Land on "They only have to be able to ask." Then stop.</a:t>
+              <a:t/>
             </a:r>
             <a:endParaRPr lang="en-US" dirty="0"/>
           </a:p>
@@ -1868,6 +1869,94 @@
             <a:fld id="{F7021451-1387-4CA6-816F-3879F97B5CBC}" type="slidenum">
               <a:rPr lang="en-US"/>
               <a:t>23</a:t>
+            </a:fld>
+            <a:endParaRPr lang="en-US"/>
+          </a:p>
+        </p:txBody>
+      </p:sp>
+    </p:spTree>
+    <p:extLst>
+      <p:ext uri="{BB962C8B-B14F-4D97-AF65-F5344CB8AC3E}">
+        <p14:creationId xmlns:p14="http://schemas.microsoft.com/office/powerpoint/2010/main" val="1024086991"/>
+      </p:ext>
+    </p:extLst>
+  </p:cSld>
+  <p:clrMapOvr>
+    <a:masterClrMapping/>
+  </p:clrMapOvr>
+</p:notes>
+</file>
+
+<file path=ppt/notesSlides/notesSlide24.xml><?xml version="1.0" encoding="utf-8"?>
+<p:notes xmlns:a="http://schemas.openxmlformats.org/drawingml/2006/main" xmlns:r="http://schemas.openxmlformats.org/officeDocument/2006/relationships" xmlns:p="http://schemas.openxmlformats.org/presentationml/2006/main">
+  <p:cSld>
+    <p:spTree>
+      <p:nvGrpSpPr>
+        <p:cNvPr id="1" name=""/>
+        <p:cNvGrpSpPr/>
+        <p:nvPr/>
+      </p:nvGrpSpPr>
+      <p:grpSpPr>
+        <a:xfrm>
+          <a:off x="0" y="0"/>
+          <a:ext cx="0" cy="0"/>
+          <a:chOff x="0" y="0"/>
+          <a:chExt cx="0" cy="0"/>
+        </a:xfrm>
+      </p:grpSpPr>
+      <p:sp>
+        <p:nvSpPr>
+          <p:cNvPr id="2" name="Slide Image Placeholder 1"/>
+          <p:cNvSpPr>
+            <a:spLocks noGrp="1" noRot="1" noChangeAspect="1"/>
+          </p:cNvSpPr>
+          <p:nvPr>
+            <p:ph type="sldImg"/>
+          </p:nvPr>
+        </p:nvSpPr>
+        <p:spPr/>
+      </p:sp>
+      <p:sp>
+        <p:nvSpPr>
+          <p:cNvPr id="3" name="Notes Placeholder 2"/>
+          <p:cNvSpPr>
+            <a:spLocks noGrp="1"/>
+          </p:cNvSpPr>
+          <p:nvPr>
+            <p:ph type="body" idx="1"/>
+          </p:nvPr>
+        </p:nvSpPr>
+        <p:spPr/>
+        <p:txBody>
+          <a:bodyPr/>
+          <a:lstStyle/>
+          <a:p>
+            <a:r>
+              <a:rPr lang="en-US" dirty="0"/>
+              <a:t>Land on "They only have to be able to ask." Then stop.</a:t>
+            </a:r>
+            <a:endParaRPr lang="en-US" dirty="0"/>
+          </a:p>
+        </p:txBody>
+      </p:sp>
+      <p:sp>
+        <p:nvSpPr>
+          <p:cNvPr id="4" name="Slide Number Placeholder 3"/>
+          <p:cNvSpPr>
+            <a:spLocks noGrp="1"/>
+          </p:cNvSpPr>
+          <p:nvPr>
+            <p:ph type="sldNum" sz="quarter" idx="10"/>
+          </p:nvPr>
+        </p:nvSpPr>
+        <p:spPr/>
+        <p:txBody>
+          <a:bodyPr/>
+          <a:lstStyle/>
+          <a:p>
+            <a:fld id="{F7021451-1387-4CA6-816F-3879F97B5CBC}" type="slidenum">
+              <a:rPr lang="en-US"/>
+              <a:t>24</a:t>
             </a:fld>
             <a:endParaRPr lang="en-US"/>
           </a:p>
@@ -11388,7 +11477,7 @@
                 <a:ea typeface="Cambria" pitchFamily="34" charset="-122"/>
                 <a:cs typeface="Cambria" pitchFamily="34" charset="-120"/>
               </a:rPr>
-              <a:t>21 of 23. Three runs. Same score every time.</a:t>
+              <a:t>The tool could not decide the thing that mattered.</a:t>
             </a:r>
             <a:endParaRPr lang="en-US" sz="3300" dirty="0"/>
           </a:p>
@@ -11396,122 +11485,18 @@
       </p:sp>
       <p:sp>
         <p:nvSpPr>
-          <p:cNvPr id="4" name="Text 2"/>
-          <p:cNvSpPr txBox="1"/>
-          <p:nvPr/>
-        </p:nvSpPr>
-        <p:spPr>
-          <a:xfrm>
-            <a:off x="777240" y="1783080"/>
-            <a:ext cx="5577840" cy="2194560"/>
-          </a:xfrm>
-          <a:prstGeom prst="rect">
-            <a:avLst/>
-          </a:prstGeom>
-          <a:noFill/>
-          <a:ln/>
-        </p:spPr>
-        <p:txBody>
-          <a:bodyPr wrap="square" lIns="0" tIns="0" rIns="0" bIns="0" rtlCol="0" anchor="ctr"/>
-          <a:lstStyle/>
-          <a:p>
-            <a:pPr marL="342900" indent="-342900">
-              <a:spcAft>
-                <a:spcPts val="800"/>
-              </a:spcAft>
-              <a:buSzPct val="100000"/>
-              <a:buChar char="•"/>
-            </a:pPr>
-            <a:r>
-              <a:rPr lang="en-US" sz="1400" b="1" dirty="0">
-                <a:solidFill>
-                  <a:srgbClr val="14171A"/>
-                </a:solidFill>
-                <a:latin typeface="Calibri" pitchFamily="34" charset="0"/>
-                <a:ea typeface="Calibri" pitchFamily="34" charset="-122"/>
-                <a:cs typeface="Calibri" pitchFamily="34" charset="-120"/>
-              </a:rPr>
-              <a:t>One assertion fails on every run</a:t>
-            </a:r>
-            <a:endParaRPr lang="en-US" sz="1400" dirty="0"/>
-          </a:p>
-          <a:p>
-            <a:pPr indent="0" marL="0">
-              <a:spcAft>
-                <a:spcPts val="800"/>
-              </a:spcAft>
-              <a:buNone/>
-            </a:pPr>
-            <a:r>
-              <a:rPr lang="en-US" sz="1400" dirty="0">
-                <a:solidFill>
-                  <a:srgbClr val="14171A"/>
-                </a:solidFill>
-                <a:latin typeface="Calibri" pitchFamily="34" charset="0"/>
-                <a:ea typeface="Calibri" pitchFamily="34" charset="-122"/>
-                <a:cs typeface="Calibri" pitchFamily="34" charset="-120"/>
-              </a:rPr>
-              <a:t>the agent does not reliably say out loud that it discarded a volunteered condition</a:t>
-            </a:r>
-            <a:endParaRPr lang="en-US" sz="1400" dirty="0"/>
-          </a:p>
-          <a:p>
-            <a:pPr marL="342900" indent="-342900">
-              <a:spcAft>
-                <a:spcPts val="800"/>
-              </a:spcAft>
-              <a:buSzPct val="100000"/>
-              <a:buChar char="•"/>
-            </a:pPr>
-            <a:r>
-              <a:rPr lang="en-US" sz="1400" b="1" dirty="0">
-                <a:solidFill>
-                  <a:srgbClr val="14171A"/>
-                </a:solidFill>
-                <a:latin typeface="Calibri" pitchFamily="34" charset="0"/>
-                <a:ea typeface="Calibri" pitchFamily="34" charset="-122"/>
-                <a:cs typeface="Calibri" pitchFamily="34" charset="-120"/>
-              </a:rPr>
-              <a:t>The second failure alternates</a:t>
-            </a:r>
-            <a:endParaRPr lang="en-US" sz="1400" dirty="0"/>
-          </a:p>
-          <a:p>
-            <a:pPr indent="0" marL="0">
-              <a:spcAft>
-                <a:spcPts val="800"/>
-              </a:spcAft>
-              <a:buNone/>
-            </a:pPr>
-            <a:r>
-              <a:rPr lang="en-US" sz="1400" dirty="0">
-                <a:solidFill>
-                  <a:srgbClr val="14171A"/>
-                </a:solidFill>
-                <a:latin typeface="Calibri" pitchFamily="34" charset="0"/>
-                <a:ea typeface="Calibri" pitchFamily="34" charset="-122"/>
-                <a:cs typeface="Calibri" pitchFamily="34" charset="-120"/>
-              </a:rPr>
-              <a:t>same build, same prompts, different answers, run to run</a:t>
-            </a:r>
-            <a:endParaRPr lang="en-US" sz="1400" dirty="0"/>
-          </a:p>
-        </p:txBody>
-      </p:sp>
-      <p:sp>
-        <p:nvSpPr>
-          <p:cNvPr id="5" name="Shape 3"/>
+          <p:cNvPr id="4" name="Shape 2"/>
           <p:cNvSpPr/>
           <p:nvPr/>
         </p:nvSpPr>
         <p:spPr>
           <a:xfrm>
-            <a:off x="6766560" y="1783080"/>
-            <a:ext cx="4617720" cy="2194560"/>
+            <a:off x="777240" y="1755648"/>
+            <a:ext cx="5257800" cy="1965960"/>
           </a:xfrm>
           <a:prstGeom prst="roundRect">
             <a:avLst>
-              <a:gd name="adj" fmla="val 2083"/>
+              <a:gd name="adj" fmla="val 2326"/>
             </a:avLst>
           </a:prstGeom>
           <a:solidFill>
@@ -11527,14 +11512,14 @@
       </p:sp>
       <p:sp>
         <p:nvSpPr>
-          <p:cNvPr id="6" name="Text 4"/>
-          <p:cNvSpPr txBox="1"/>
-          <p:nvPr/>
-        </p:nvSpPr>
-        <p:spPr>
-          <a:xfrm>
-            <a:off x="7022592" y="1993392"/>
-            <a:ext cx="4114800" cy="457200"/>
+          <p:cNvPr id="5" name="Text 3"/>
+          <p:cNvSpPr txBox="1"/>
+          <p:nvPr/>
+        </p:nvSpPr>
+        <p:spPr>
+          <a:xfrm>
+            <a:off x="1033272" y="1938528"/>
+            <a:ext cx="4754880" cy="329184"/>
           </a:xfrm>
           <a:prstGeom prst="rect">
             <a:avLst/>
@@ -11558,7 +11543,7 @@
                 <a:ea typeface="Cambria" pitchFamily="34" charset="-122"/>
                 <a:cs typeface="Cambria" pitchFamily="34" charset="-120"/>
               </a:rPr>
-              <a:t>Where it is deterministic, it is 100%</a:t>
+              <a:t>What it passed</a:t>
             </a:r>
             <a:endParaRPr lang="en-US" sz="1450" dirty="0"/>
           </a:p>
@@ -11566,30 +11551,30 @@
       </p:sp>
       <p:sp>
         <p:nvSpPr>
-          <p:cNvPr id="7" name="Text 5"/>
-          <p:cNvSpPr txBox="1"/>
-          <p:nvPr/>
-        </p:nvSpPr>
-        <p:spPr>
-          <a:xfrm>
-            <a:off x="7022592" y="2487168"/>
-            <a:ext cx="4114800" cy="1280160"/>
-          </a:xfrm>
-          <a:prstGeom prst="rect">
-            <a:avLst/>
-          </a:prstGeom>
-          <a:noFill/>
-          <a:ln/>
-        </p:spPr>
-        <p:txBody>
-          <a:bodyPr wrap="square" lIns="0" tIns="0" rIns="0" bIns="0" rtlCol="0" anchor="ctr"/>
-          <a:lstStyle/>
-          <a:p>
-            <a:pPr indent="0" marL="0">
-              <a:buNone/>
-            </a:pPr>
-            <a:r>
-              <a:rPr lang="en-US" sz="1250" dirty="0">
+          <p:cNvPr id="6" name="Text 4"/>
+          <p:cNvSpPr txBox="1"/>
+          <p:nvPr/>
+        </p:nvSpPr>
+        <p:spPr>
+          <a:xfrm>
+            <a:off x="1033272" y="2359152"/>
+            <a:ext cx="4754880" cy="1188720"/>
+          </a:xfrm>
+          <a:prstGeom prst="rect">
+            <a:avLst/>
+          </a:prstGeom>
+          <a:noFill/>
+          <a:ln/>
+        </p:spPr>
+        <p:txBody>
+          <a:bodyPr wrap="square" lIns="0" tIns="0" rIns="0" bIns="0" rtlCol="0" anchor="ctr"/>
+          <a:lstStyle/>
+          <a:p>
+            <a:pPr indent="0" marL="0">
+              <a:buNone/>
+            </a:pPr>
+            <a:r>
+              <a:rPr lang="en-US" sz="1200" dirty="0">
                 <a:solidFill>
                   <a:srgbClr val="14171A"/>
                 </a:solidFill>
@@ -11597,11 +11582,38 @@
                 <a:ea typeface="Calibri" pitchFamily="34" charset="-122"/>
                 <a:cs typeface="Calibri" pitchFamily="34" charset="-120"/>
               </a:rPr>
-              <a:t>The four channels that compose their reply in Apex, web, text, email and Slack, say it every single time. Pinned by a test that exercises all four.</a:t>
-            </a:r>
-            <a:endParaRPr lang="en-US" sz="1250" dirty="0"/>
-          </a:p>
-        </p:txBody>
+              <a:t>Sa11y, Salesforce’s own axe-core matcher, reached through the lwc-experts toolset in the DX MCP server. Twelve component states, 131 checks, zero WCAG violations, against the 100-rule preset rather than the 64-rule default.</a:t>
+            </a:r>
+            <a:endParaRPr lang="en-US" sz="1200" dirty="0"/>
+          </a:p>
+        </p:txBody>
+      </p:sp>
+      <p:sp>
+        <p:nvSpPr>
+          <p:cNvPr id="7" name="Shape 5"/>
+          <p:cNvSpPr/>
+          <p:nvPr/>
+        </p:nvSpPr>
+        <p:spPr>
+          <a:xfrm>
+            <a:off x="6400800" y="1755648"/>
+            <a:ext cx="4983480" cy="1965960"/>
+          </a:xfrm>
+          <a:prstGeom prst="roundRect">
+            <a:avLst>
+              <a:gd name="adj" fmla="val 2326"/>
+            </a:avLst>
+          </a:prstGeom>
+          <a:solidFill>
+            <a:srgbClr val="FFFFFF"/>
+          </a:solidFill>
+          <a:ln w="19050">
+            <a:solidFill>
+              <a:srgbClr val="8A2F24"/>
+            </a:solidFill>
+            <a:prstDash val="solid"/>
+          </a:ln>
+        </p:spPr>
       </p:sp>
       <p:sp>
         <p:nvSpPr>
@@ -11611,32 +11623,32 @@
         </p:nvSpPr>
         <p:spPr>
           <a:xfrm>
-            <a:off x="777240" y="4206240"/>
-            <a:ext cx="10515600" cy="822960"/>
-          </a:xfrm>
-          <a:prstGeom prst="rect">
-            <a:avLst/>
-          </a:prstGeom>
-          <a:noFill/>
-          <a:ln/>
-        </p:spPr>
-        <p:txBody>
-          <a:bodyPr wrap="square" lIns="0" tIns="0" rIns="0" bIns="0" rtlCol="0" anchor="ctr"/>
-          <a:lstStyle/>
-          <a:p>
-            <a:pPr indent="0" marL="0">
-              <a:buNone/>
-            </a:pPr>
-            <a:r>
-              <a:rPr lang="en-US" sz="1450" i="1" dirty="0">
-                <a:solidFill>
-                  <a:srgbClr val="14171A"/>
+            <a:off x="6656832" y="1938528"/>
+            <a:ext cx="4480560" cy="329184"/>
+          </a:xfrm>
+          <a:prstGeom prst="rect">
+            <a:avLst/>
+          </a:prstGeom>
+          <a:noFill/>
+          <a:ln/>
+        </p:spPr>
+        <p:txBody>
+          <a:bodyPr wrap="square" lIns="0" tIns="0" rIns="0" bIns="0" rtlCol="0" anchor="ctr"/>
+          <a:lstStyle/>
+          <a:p>
+            <a:pPr indent="0" marL="0">
+              <a:buNone/>
+            </a:pPr>
+            <a:r>
+              <a:rPr lang="en-US" sz="1450" b="1" dirty="0">
+                <a:solidFill>
+                  <a:srgbClr val="8A2F24"/>
                 </a:solidFill>
                 <a:latin typeface="Cambria" pitchFamily="34" charset="0"/>
                 <a:ea typeface="Cambria" pitchFamily="34" charset="-122"/>
                 <a:cs typeface="Cambria" pitchFamily="34" charset="-120"/>
               </a:rPr>
-              <a:t>"Good" is 23 of 23 with zero variance across five runs. Getting there means moving anything safety critical out of the model’s narration and into code that runs whether or not it remembers.</a:t>
+              <a:t>What it returned instead</a:t>
             </a:r>
             <a:endParaRPr lang="en-US" sz="1450" dirty="0"/>
           </a:p>
@@ -11650,8 +11662,8 @@
         </p:nvSpPr>
         <p:spPr>
           <a:xfrm>
-            <a:off x="777240" y="5212080"/>
-            <a:ext cx="10698480" cy="457200"/>
+            <a:off x="6656832" y="2359152"/>
+            <a:ext cx="4480560" cy="1188720"/>
           </a:xfrm>
           <a:prstGeom prst="rect">
             <a:avLst/>
@@ -11669,15 +11681,157 @@
             <a:r>
               <a:rPr lang="en-US" sz="1200" dirty="0">
                 <a:solidFill>
+                  <a:srgbClr val="14171A"/>
+                </a:solidFill>
+                <a:latin typeface="Calibri" pitchFamily="34" charset="0"/>
+                <a:ea typeface="Calibri" pitchFamily="34" charset="-122"/>
+                <a:cs typeface="Calibri" pitchFamily="34" charset="-120"/>
+              </a:rPr>
+              <a:t>On the signed video, WCAG 1.2.2 came back incomplete, not pass. Inside a test runner axe cannot inspect media. So it could not settle it. A person using a screen reader would have settled it immediately.</a:t>
+            </a:r>
+            <a:endParaRPr lang="en-US" sz="1200" dirty="0"/>
+          </a:p>
+        </p:txBody>
+      </p:sp>
+      <p:sp>
+        <p:nvSpPr>
+          <p:cNvPr id="10" name="Text 8"/>
+          <p:cNvSpPr txBox="1"/>
+          <p:nvPr/>
+        </p:nvSpPr>
+        <p:spPr>
+          <a:xfrm>
+            <a:off x="777240" y="3950208"/>
+            <a:ext cx="10607040" cy="804672"/>
+          </a:xfrm>
+          <a:prstGeom prst="rect">
+            <a:avLst/>
+          </a:prstGeom>
+          <a:noFill/>
+          <a:ln/>
+        </p:spPr>
+        <p:txBody>
+          <a:bodyPr wrap="square" lIns="0" tIns="0" rIns="0" bIns="0" rtlCol="0" anchor="ctr"/>
+          <a:lstStyle/>
+          <a:p>
+            <a:pPr indent="0" marL="0">
+              <a:buNone/>
+            </a:pPr>
+            <a:r>
+              <a:rPr lang="en-US" sz="1350" dirty="0">
+                <a:solidFill>
                   <a:srgbClr val="42474C"/>
                 </a:solidFill>
-                <a:latin typeface="Courier New" pitchFamily="34" charset="0"/>
-                <a:ea typeface="Courier New" pitchFamily="34" charset="-122"/>
-                <a:cs typeface="Courier New" pitchFamily="34" charset="-120"/>
-              </a:rPr>
-              <a:t>124 Apex tests   |   491 structural invariants   |   333 accessibility checks   |   28 contrast   |   16 reading level   |   all passing, every build</a:t>
-            </a:r>
-            <a:endParaRPr lang="en-US" sz="1200" dirty="0"/>
+                <a:latin typeface="Calibri" pitchFamily="34" charset="0"/>
+                <a:ea typeface="Calibri" pitchFamily="34" charset="-122"/>
+                <a:cs typeface="Calibri" pitchFamily="34" charset="-120"/>
+              </a:rPr>
+              <a:t>The obvious remedy was the forbidden one. That video is usually a Deaf person signing, and a machine caption would put words in somebody’s mouth about their own body, then file them. So the video now says so itself, to the person who cannot watch it:</a:t>
+            </a:r>
+            <a:endParaRPr lang="en-US" sz="1350" dirty="0"/>
+          </a:p>
+        </p:txBody>
+      </p:sp>
+      <p:sp>
+        <p:nvSpPr>
+          <p:cNvPr id="11" name="Shape 9"/>
+          <p:cNvSpPr/>
+          <p:nvPr/>
+        </p:nvSpPr>
+        <p:spPr>
+          <a:xfrm>
+            <a:off x="777240" y="4864608"/>
+            <a:ext cx="54864" cy="658368"/>
+          </a:xfrm>
+          <a:prstGeom prst="rect">
+            <a:avLst/>
+          </a:prstGeom>
+          <a:solidFill>
+            <a:srgbClr val="C9A227"/>
+          </a:solidFill>
+          <a:ln w="12700">
+            <a:solidFill>
+              <a:srgbClr val="C9A227"/>
+            </a:solidFill>
+            <a:prstDash val="solid"/>
+          </a:ln>
+        </p:spPr>
+      </p:sp>
+      <p:sp>
+        <p:nvSpPr>
+          <p:cNvPr id="12" name="Text 10"/>
+          <p:cNvSpPr txBox="1"/>
+          <p:nvPr/>
+        </p:nvSpPr>
+        <p:spPr>
+          <a:xfrm>
+            <a:off x="1033272" y="4864608"/>
+            <a:ext cx="10332720" cy="658368"/>
+          </a:xfrm>
+          <a:prstGeom prst="rect">
+            <a:avLst/>
+          </a:prstGeom>
+          <a:noFill/>
+          <a:ln/>
+        </p:spPr>
+        <p:txBody>
+          <a:bodyPr wrap="square" lIns="0" tIns="0" rIns="0" bIns="0" rtlCol="0" anchor="ctr"/>
+          <a:lstStyle/>
+          <a:p>
+            <a:pPr indent="0" marL="0">
+              <a:buNone/>
+            </a:pPr>
+            <a:r>
+              <a:rPr lang="en-US" sz="1600" i="1" dirty="0">
+                <a:solidFill>
+                  <a:srgbClr val="14171A"/>
+                </a:solidFill>
+                <a:latin typeface="Cambria" pitchFamily="34" charset="0"/>
+                <a:ea typeface="Cambria" pitchFamily="34" charset="-122"/>
+                <a:cs typeface="Cambria" pitchFamily="34" charset="-120"/>
+              </a:rPr>
+              <a:t>“No captions and no transcript, and none will be generated. This is waiting on a human interpreter.”</a:t>
+            </a:r>
+            <a:endParaRPr lang="en-US" sz="1600" dirty="0"/>
+          </a:p>
+        </p:txBody>
+      </p:sp>
+      <p:sp>
+        <p:nvSpPr>
+          <p:cNvPr id="13" name="Text 11"/>
+          <p:cNvSpPr txBox="1"/>
+          <p:nvPr/>
+        </p:nvSpPr>
+        <p:spPr>
+          <a:xfrm>
+            <a:off x="777240" y="5742432"/>
+            <a:ext cx="10698480" cy="603504"/>
+          </a:xfrm>
+          <a:prstGeom prst="rect">
+            <a:avLst/>
+          </a:prstGeom>
+          <a:noFill/>
+          <a:ln/>
+        </p:spPr>
+        <p:txBody>
+          <a:bodyPr wrap="square" lIns="0" tIns="0" rIns="0" bIns="0" rtlCol="0" anchor="ctr"/>
+          <a:lstStyle/>
+          <a:p>
+            <a:pPr indent="0" marL="0">
+              <a:buNone/>
+            </a:pPr>
+            <a:r>
+              <a:rPr lang="en-US" sz="1600" i="1" dirty="0">
+                <a:solidFill>
+                  <a:srgbClr val="9A6608"/>
+                </a:solidFill>
+                <a:latin typeface="Cambria" pitchFamily="34" charset="0"/>
+                <a:ea typeface="Cambria" pitchFamily="34" charset="-122"/>
+                <a:cs typeface="Cambria" pitchFamily="34" charset="-120"/>
+              </a:rPr>
+              <a:t>An incomplete is not a pass. Reporting it as one would have been the easiest lie in the submission.</a:t>
+            </a:r>
+            <a:endParaRPr lang="en-US" sz="1600" dirty="0"/>
           </a:p>
         </p:txBody>
       </p:sp>
@@ -11785,7 +11939,7 @@
                 <a:ea typeface="Cambria" pitchFamily="34" charset="-122"/>
                 <a:cs typeface="Cambria" pitchFamily="34" charset="-120"/>
               </a:rPr>
-              <a:t>What is still wrong.</a:t>
+              <a:t>21 of 23. Three runs. Same score every time.</a:t>
             </a:r>
             <a:endParaRPr lang="en-US" sz="3300" dirty="0"/>
           </a:p>
@@ -11800,101 +11954,232 @@
         <p:spPr>
           <a:xfrm>
             <a:off x="777240" y="1783080"/>
-            <a:ext cx="4114800" cy="411480"/>
-          </a:xfrm>
-          <a:prstGeom prst="rect">
-            <a:avLst/>
-          </a:prstGeom>
-          <a:noFill/>
-          <a:ln/>
-        </p:spPr>
-        <p:txBody>
-          <a:bodyPr wrap="square" lIns="0" tIns="0" rIns="0" bIns="0" rtlCol="0" anchor="ctr"/>
-          <a:lstStyle/>
-          <a:p>
-            <a:pPr indent="0" marL="0">
-              <a:buNone/>
-            </a:pPr>
-            <a:r>
-              <a:rPr lang="en-US" sz="1350" b="1" dirty="0">
+            <a:ext cx="5577840" cy="2194560"/>
+          </a:xfrm>
+          <a:prstGeom prst="rect">
+            <a:avLst/>
+          </a:prstGeom>
+          <a:noFill/>
+          <a:ln/>
+        </p:spPr>
+        <p:txBody>
+          <a:bodyPr wrap="square" lIns="0" tIns="0" rIns="0" bIns="0" rtlCol="0" anchor="ctr"/>
+          <a:lstStyle/>
+          <a:p>
+            <a:pPr marL="342900" indent="-342900">
+              <a:spcAft>
+                <a:spcPts val="800"/>
+              </a:spcAft>
+              <a:buSzPct val="100000"/>
+              <a:buChar char="•"/>
+            </a:pPr>
+            <a:r>
+              <a:rPr lang="en-US" sz="1400" b="1" dirty="0">
                 <a:solidFill>
                   <a:srgbClr val="14171A"/>
+                </a:solidFill>
+                <a:latin typeface="Calibri" pitchFamily="34" charset="0"/>
+                <a:ea typeface="Calibri" pitchFamily="34" charset="-122"/>
+                <a:cs typeface="Calibri" pitchFamily="34" charset="-120"/>
+              </a:rPr>
+              <a:t>One assertion fails on every run</a:t>
+            </a:r>
+            <a:endParaRPr lang="en-US" sz="1400" dirty="0"/>
+          </a:p>
+          <a:p>
+            <a:pPr indent="0" marL="0">
+              <a:spcAft>
+                <a:spcPts val="800"/>
+              </a:spcAft>
+              <a:buNone/>
+            </a:pPr>
+            <a:r>
+              <a:rPr lang="en-US" sz="1400" dirty="0">
+                <a:solidFill>
+                  <a:srgbClr val="14171A"/>
+                </a:solidFill>
+                <a:latin typeface="Calibri" pitchFamily="34" charset="0"/>
+                <a:ea typeface="Calibri" pitchFamily="34" charset="-122"/>
+                <a:cs typeface="Calibri" pitchFamily="34" charset="-120"/>
+              </a:rPr>
+              <a:t>the agent does not reliably say out loud that it discarded a volunteered condition</a:t>
+            </a:r>
+            <a:endParaRPr lang="en-US" sz="1400" dirty="0"/>
+          </a:p>
+          <a:p>
+            <a:pPr marL="342900" indent="-342900">
+              <a:spcAft>
+                <a:spcPts val="800"/>
+              </a:spcAft>
+              <a:buSzPct val="100000"/>
+              <a:buChar char="•"/>
+            </a:pPr>
+            <a:r>
+              <a:rPr lang="en-US" sz="1400" b="1" dirty="0">
+                <a:solidFill>
+                  <a:srgbClr val="14171A"/>
+                </a:solidFill>
+                <a:latin typeface="Calibri" pitchFamily="34" charset="0"/>
+                <a:ea typeface="Calibri" pitchFamily="34" charset="-122"/>
+                <a:cs typeface="Calibri" pitchFamily="34" charset="-120"/>
+              </a:rPr>
+              <a:t>The second failure alternates</a:t>
+            </a:r>
+            <a:endParaRPr lang="en-US" sz="1400" dirty="0"/>
+          </a:p>
+          <a:p>
+            <a:pPr indent="0" marL="0">
+              <a:spcAft>
+                <a:spcPts val="800"/>
+              </a:spcAft>
+              <a:buNone/>
+            </a:pPr>
+            <a:r>
+              <a:rPr lang="en-US" sz="1400" dirty="0">
+                <a:solidFill>
+                  <a:srgbClr val="14171A"/>
+                </a:solidFill>
+                <a:latin typeface="Calibri" pitchFamily="34" charset="0"/>
+                <a:ea typeface="Calibri" pitchFamily="34" charset="-122"/>
+                <a:cs typeface="Calibri" pitchFamily="34" charset="-120"/>
+              </a:rPr>
+              <a:t>same build, same prompts, different answers, run to run</a:t>
+            </a:r>
+            <a:endParaRPr lang="en-US" sz="1400" dirty="0"/>
+          </a:p>
+        </p:txBody>
+      </p:sp>
+      <p:sp>
+        <p:nvSpPr>
+          <p:cNvPr id="5" name="Shape 3"/>
+          <p:cNvSpPr/>
+          <p:nvPr/>
+        </p:nvSpPr>
+        <p:spPr>
+          <a:xfrm>
+            <a:off x="6766560" y="1783080"/>
+            <a:ext cx="4617720" cy="2194560"/>
+          </a:xfrm>
+          <a:prstGeom prst="roundRect">
+            <a:avLst>
+              <a:gd name="adj" fmla="val 2083"/>
+            </a:avLst>
+          </a:prstGeom>
+          <a:solidFill>
+            <a:srgbClr val="FFFFFF"/>
+          </a:solidFill>
+          <a:ln w="19050">
+            <a:solidFill>
+              <a:srgbClr val="1F5546"/>
+            </a:solidFill>
+            <a:prstDash val="solid"/>
+          </a:ln>
+        </p:spPr>
+      </p:sp>
+      <p:sp>
+        <p:nvSpPr>
+          <p:cNvPr id="6" name="Text 4"/>
+          <p:cNvSpPr txBox="1"/>
+          <p:nvPr/>
+        </p:nvSpPr>
+        <p:spPr>
+          <a:xfrm>
+            <a:off x="7022592" y="1993392"/>
+            <a:ext cx="4114800" cy="457200"/>
+          </a:xfrm>
+          <a:prstGeom prst="rect">
+            <a:avLst/>
+          </a:prstGeom>
+          <a:noFill/>
+          <a:ln/>
+        </p:spPr>
+        <p:txBody>
+          <a:bodyPr wrap="square" lIns="0" tIns="0" rIns="0" bIns="0" rtlCol="0" anchor="ctr"/>
+          <a:lstStyle/>
+          <a:p>
+            <a:pPr indent="0" marL="0">
+              <a:buNone/>
+            </a:pPr>
+            <a:r>
+              <a:rPr lang="en-US" sz="1450" b="1" dirty="0">
+                <a:solidFill>
+                  <a:srgbClr val="1F5546"/>
                 </a:solidFill>
                 <a:latin typeface="Cambria" pitchFamily="34" charset="0"/>
                 <a:ea typeface="Cambria" pitchFamily="34" charset="-122"/>
                 <a:cs typeface="Cambria" pitchFamily="34" charset="-120"/>
               </a:rPr>
-              <a:t>No screen-reader user has tested this.</a:t>
-            </a:r>
-            <a:endParaRPr lang="en-US" sz="1350" dirty="0"/>
-          </a:p>
-        </p:txBody>
-      </p:sp>
-      <p:sp>
-        <p:nvSpPr>
-          <p:cNvPr id="5" name="Text 3"/>
-          <p:cNvSpPr txBox="1"/>
-          <p:nvPr/>
-        </p:nvSpPr>
-        <p:spPr>
-          <a:xfrm>
-            <a:off x="5029200" y="1783080"/>
-            <a:ext cx="6355080" cy="868680"/>
-          </a:xfrm>
-          <a:prstGeom prst="rect">
-            <a:avLst/>
-          </a:prstGeom>
-          <a:noFill/>
-          <a:ln/>
-        </p:spPr>
-        <p:txBody>
-          <a:bodyPr wrap="square" lIns="0" tIns="0" rIns="0" bIns="0" rtlCol="0" anchor="ctr"/>
-          <a:lstStyle/>
-          <a:p>
-            <a:pPr indent="0" marL="0">
-              <a:buNone/>
-            </a:pPr>
-            <a:r>
-              <a:rPr lang="en-US" sz="1150" dirty="0">
-                <a:solidFill>
-                  <a:srgbClr val="42474C"/>
+              <a:t>Where it is deterministic, it is 100%</a:t>
+            </a:r>
+            <a:endParaRPr lang="en-US" sz="1450" dirty="0"/>
+          </a:p>
+        </p:txBody>
+      </p:sp>
+      <p:sp>
+        <p:nvSpPr>
+          <p:cNvPr id="7" name="Text 5"/>
+          <p:cNvSpPr txBox="1"/>
+          <p:nvPr/>
+        </p:nvSpPr>
+        <p:spPr>
+          <a:xfrm>
+            <a:off x="7022592" y="2487168"/>
+            <a:ext cx="4114800" cy="1280160"/>
+          </a:xfrm>
+          <a:prstGeom prst="rect">
+            <a:avLst/>
+          </a:prstGeom>
+          <a:noFill/>
+          <a:ln/>
+        </p:spPr>
+        <p:txBody>
+          <a:bodyPr wrap="square" lIns="0" tIns="0" rIns="0" bIns="0" rtlCol="0" anchor="ctr"/>
+          <a:lstStyle/>
+          <a:p>
+            <a:pPr indent="0" marL="0">
+              <a:buNone/>
+            </a:pPr>
+            <a:r>
+              <a:rPr lang="en-US" sz="1250" dirty="0">
+                <a:solidFill>
+                  <a:srgbClr val="14171A"/>
                 </a:solidFill>
                 <a:latin typeface="Calibri" pitchFamily="34" charset="0"/>
                 <a:ea typeface="Calibri" pitchFamily="34" charset="-122"/>
                 <a:cs typeface="Calibri" pitchFamily="34" charset="-120"/>
               </a:rPr>
-              <a:t>Every accessibility claim is machine or browser verified, which is not the same as a person using it. One session with somebody who uses one daily is worth more than the next five features.</a:t>
-            </a:r>
-            <a:endParaRPr lang="en-US" sz="1150" dirty="0"/>
-          </a:p>
-        </p:txBody>
-      </p:sp>
-      <p:sp>
-        <p:nvSpPr>
-          <p:cNvPr id="6" name="Text 4"/>
-          <p:cNvSpPr txBox="1"/>
-          <p:nvPr/>
-        </p:nvSpPr>
-        <p:spPr>
-          <a:xfrm>
-            <a:off x="777240" y="2743200"/>
-            <a:ext cx="4114800" cy="411480"/>
-          </a:xfrm>
-          <a:prstGeom prst="rect">
-            <a:avLst/>
-          </a:prstGeom>
-          <a:noFill/>
-          <a:ln/>
-        </p:spPr>
-        <p:txBody>
-          <a:bodyPr wrap="square" lIns="0" tIns="0" rIns="0" bIns="0" rtlCol="0" anchor="ctr"/>
-          <a:lstStyle/>
-          <a:p>
-            <a:pPr indent="0" marL="0">
-              <a:buNone/>
-            </a:pPr>
-            <a:r>
-              <a:rPr lang="en-US" sz="1350" b="1" dirty="0">
+              <a:t>The four channels that compose their reply in Apex, web, text, email and Slack, say it every single time. Pinned by a test that exercises all four.</a:t>
+            </a:r>
+            <a:endParaRPr lang="en-US" sz="1250" dirty="0"/>
+          </a:p>
+        </p:txBody>
+      </p:sp>
+      <p:sp>
+        <p:nvSpPr>
+          <p:cNvPr id="8" name="Text 6"/>
+          <p:cNvSpPr txBox="1"/>
+          <p:nvPr/>
+        </p:nvSpPr>
+        <p:spPr>
+          <a:xfrm>
+            <a:off x="777240" y="4206240"/>
+            <a:ext cx="10515600" cy="822960"/>
+          </a:xfrm>
+          <a:prstGeom prst="rect">
+            <a:avLst/>
+          </a:prstGeom>
+          <a:noFill/>
+          <a:ln/>
+        </p:spPr>
+        <p:txBody>
+          <a:bodyPr wrap="square" lIns="0" tIns="0" rIns="0" bIns="0" rtlCol="0" anchor="ctr"/>
+          <a:lstStyle/>
+          <a:p>
+            <a:pPr indent="0" marL="0">
+              <a:buNone/>
+            </a:pPr>
+            <a:r>
+              <a:rPr lang="en-US" sz="1450" i="1" dirty="0">
                 <a:solidFill>
                   <a:srgbClr val="14171A"/>
                 </a:solidFill>
@@ -11902,243 +12187,48 @@
                 <a:ea typeface="Cambria" pitchFamily="34" charset="-122"/>
                 <a:cs typeface="Cambria" pitchFamily="34" charset="-120"/>
               </a:rPr>
-              <a:t>The agent’s narration is nondeterministic.</a:t>
-            </a:r>
-            <a:endParaRPr lang="en-US" sz="1350" dirty="0"/>
-          </a:p>
-        </p:txBody>
-      </p:sp>
-      <p:sp>
-        <p:nvSpPr>
-          <p:cNvPr id="7" name="Text 5"/>
-          <p:cNvSpPr txBox="1"/>
-          <p:nvPr/>
-        </p:nvSpPr>
-        <p:spPr>
-          <a:xfrm>
-            <a:off x="5029200" y="2743200"/>
-            <a:ext cx="6355080" cy="868680"/>
-          </a:xfrm>
-          <a:prstGeom prst="rect">
-            <a:avLst/>
-          </a:prstGeom>
-          <a:noFill/>
-          <a:ln/>
-        </p:spPr>
-        <p:txBody>
-          <a:bodyPr wrap="square" lIns="0" tIns="0" rIns="0" bIns="0" rtlCol="0" anchor="ctr"/>
-          <a:lstStyle/>
-          <a:p>
-            <a:pPr indent="0" marL="0">
-              <a:buNone/>
-            </a:pPr>
-            <a:r>
-              <a:rPr lang="en-US" sz="1150" dirty="0">
+              <a:t>"Good" is 23 of 23 with zero variance across five runs. Getting there means moving anything safety critical out of the model’s narration and into code that runs whether or not it remembers.</a:t>
+            </a:r>
+            <a:endParaRPr lang="en-US" sz="1450" dirty="0"/>
+          </a:p>
+        </p:txBody>
+      </p:sp>
+      <p:sp>
+        <p:nvSpPr>
+          <p:cNvPr id="9" name="Text 7"/>
+          <p:cNvSpPr txBox="1"/>
+          <p:nvPr/>
+        </p:nvSpPr>
+        <p:spPr>
+          <a:xfrm>
+            <a:off x="777240" y="5212080"/>
+            <a:ext cx="10698480" cy="457200"/>
+          </a:xfrm>
+          <a:prstGeom prst="rect">
+            <a:avLst/>
+          </a:prstGeom>
+          <a:noFill/>
+          <a:ln/>
+        </p:spPr>
+        <p:txBody>
+          <a:bodyPr wrap="square" lIns="0" tIns="0" rIns="0" bIns="0" rtlCol="0" anchor="ctr"/>
+          <a:lstStyle/>
+          <a:p>
+            <a:pPr indent="0" marL="0">
+              <a:buNone/>
+            </a:pPr>
+            <a:r>
+              <a:rPr lang="en-US" sz="1200" dirty="0">
                 <a:solidFill>
                   <a:srgbClr val="42474C"/>
                 </a:solidFill>
-                <a:latin typeface="Calibri" pitchFamily="34" charset="0"/>
-                <a:ea typeface="Calibri" pitchFamily="34" charset="-122"/>
-                <a:cs typeface="Calibri" pitchFamily="34" charset="-120"/>
-              </a:rPr>
-              <a:t>It rewrites what an action returns rather than relaying it. Three separate fixes did not move it.</a:t>
-            </a:r>
-            <a:endParaRPr lang="en-US" sz="1150" dirty="0"/>
-          </a:p>
-        </p:txBody>
-      </p:sp>
-      <p:sp>
-        <p:nvSpPr>
-          <p:cNvPr id="8" name="Text 6"/>
-          <p:cNvSpPr txBox="1"/>
-          <p:nvPr/>
-        </p:nvSpPr>
-        <p:spPr>
-          <a:xfrm>
-            <a:off x="777240" y="3703320"/>
-            <a:ext cx="4114800" cy="411480"/>
-          </a:xfrm>
-          <a:prstGeom prst="rect">
-            <a:avLst/>
-          </a:prstGeom>
-          <a:noFill/>
-          <a:ln/>
-        </p:spPr>
-        <p:txBody>
-          <a:bodyPr wrap="square" lIns="0" tIns="0" rIns="0" bIns="0" rtlCol="0" anchor="ctr"/>
-          <a:lstStyle/>
-          <a:p>
-            <a:pPr indent="0" marL="0">
-              <a:buNone/>
-            </a:pPr>
-            <a:r>
-              <a:rPr lang="en-US" sz="1350" b="1" dirty="0">
-                <a:solidFill>
-                  <a:srgbClr val="14171A"/>
-                </a:solidFill>
-                <a:latin typeface="Cambria" pitchFamily="34" charset="0"/>
-                <a:ea typeface="Cambria" pitchFamily="34" charset="-122"/>
-                <a:cs typeface="Cambria" pitchFamily="34" charset="-120"/>
-              </a:rPr>
-              <a:t>Text messaging is not carrier registered.</a:t>
-            </a:r>
-            <a:endParaRPr lang="en-US" sz="1350" dirty="0"/>
-          </a:p>
-        </p:txBody>
-      </p:sp>
-      <p:sp>
-        <p:nvSpPr>
-          <p:cNvPr id="9" name="Text 7"/>
-          <p:cNvSpPr txBox="1"/>
-          <p:nvPr/>
-        </p:nvSpPr>
-        <p:spPr>
-          <a:xfrm>
-            <a:off x="5029200" y="3703320"/>
-            <a:ext cx="6355080" cy="868680"/>
-          </a:xfrm>
-          <a:prstGeom prst="rect">
-            <a:avLst/>
-          </a:prstGeom>
-          <a:noFill/>
-          <a:ln/>
-        </p:spPr>
-        <p:txBody>
-          <a:bodyPr wrap="square" lIns="0" tIns="0" rIns="0" bIns="0" rtlCol="0" anchor="ctr"/>
-          <a:lstStyle/>
-          <a:p>
-            <a:pPr indent="0" marL="0">
-              <a:buNone/>
-            </a:pPr>
-            <a:r>
-              <a:rPr lang="en-US" sz="1150" dirty="0">
-                <a:solidFill>
-                  <a:srgbClr val="42474C"/>
-                </a:solidFill>
-                <a:latin typeface="Calibri" pitchFamily="34" charset="0"/>
-                <a:ea typeface="Calibri" pitchFamily="34" charset="-122"/>
-                <a:cs typeface="Calibri" pitchFamily="34" charset="-120"/>
-              </a:rPr>
-              <a:t>A2P 10DLC gates SMS from a ten digit number. Voice on the same number needs none and works today.</a:t>
-            </a:r>
-            <a:endParaRPr lang="en-US" sz="1150" dirty="0"/>
-          </a:p>
-        </p:txBody>
-      </p:sp>
-      <p:sp>
-        <p:nvSpPr>
-          <p:cNvPr id="10" name="Text 8"/>
-          <p:cNvSpPr txBox="1"/>
-          <p:nvPr/>
-        </p:nvSpPr>
-        <p:spPr>
-          <a:xfrm>
-            <a:off x="777240" y="4663440"/>
-            <a:ext cx="4114800" cy="411480"/>
-          </a:xfrm>
-          <a:prstGeom prst="rect">
-            <a:avLst/>
-          </a:prstGeom>
-          <a:noFill/>
-          <a:ln/>
-        </p:spPr>
-        <p:txBody>
-          <a:bodyPr wrap="square" lIns="0" tIns="0" rIns="0" bIns="0" rtlCol="0" anchor="ctr"/>
-          <a:lstStyle/>
-          <a:p>
-            <a:pPr indent="0" marL="0">
-              <a:buNone/>
-            </a:pPr>
-            <a:r>
-              <a:rPr lang="en-US" sz="1350" b="1" dirty="0">
-                <a:solidFill>
-                  <a:srgbClr val="14171A"/>
-                </a:solidFill>
-                <a:latin typeface="Cambria" pitchFamily="34" charset="0"/>
-                <a:ea typeface="Cambria" pitchFamily="34" charset="-122"/>
-                <a:cs typeface="Cambria" pitchFamily="34" charset="-120"/>
-              </a:rPr>
-              <a:t>The Slack app has never met a real workspace.</a:t>
-            </a:r>
-            <a:endParaRPr lang="en-US" sz="1350" dirty="0"/>
-          </a:p>
-        </p:txBody>
-      </p:sp>
-      <p:sp>
-        <p:nvSpPr>
-          <p:cNvPr id="11" name="Text 9"/>
-          <p:cNvSpPr txBox="1"/>
-          <p:nvPr/>
-        </p:nvSpPr>
-        <p:spPr>
-          <a:xfrm>
-            <a:off x="5029200" y="4663440"/>
-            <a:ext cx="6355080" cy="868680"/>
-          </a:xfrm>
-          <a:prstGeom prst="rect">
-            <a:avLst/>
-          </a:prstGeom>
-          <a:noFill/>
-          <a:ln/>
-        </p:spPr>
-        <p:txBody>
-          <a:bodyPr wrap="square" lIns="0" tIns="0" rIns="0" bIns="0" rtlCol="0" anchor="ctr"/>
-          <a:lstStyle/>
-          <a:p>
-            <a:pPr indent="0" marL="0">
-              <a:buNone/>
-            </a:pPr>
-            <a:r>
-              <a:rPr lang="en-US" sz="1150" dirty="0">
-                <a:solidFill>
-                  <a:srgbClr val="42474C"/>
-                </a:solidFill>
-                <a:latin typeface="Calibri" pitchFamily="34" charset="0"/>
-                <a:ea typeface="Calibri" pitchFamily="34" charset="-122"/>
-                <a:cs typeface="Calibri" pitchFamily="34" charset="-120"/>
-              </a:rPr>
-              <a:t>The Apex behind it is live and verified. The handshake is not.</a:t>
-            </a:r>
-            <a:endParaRPr lang="en-US" sz="1150" dirty="0"/>
-          </a:p>
-        </p:txBody>
-      </p:sp>
-      <p:sp>
-        <p:nvSpPr>
-          <p:cNvPr id="12" name="Text 10"/>
-          <p:cNvSpPr txBox="1"/>
-          <p:nvPr/>
-        </p:nvSpPr>
-        <p:spPr>
-          <a:xfrm>
-            <a:off x="777240" y="5742432"/>
-            <a:ext cx="10698480" cy="603504"/>
-          </a:xfrm>
-          <a:prstGeom prst="rect">
-            <a:avLst/>
-          </a:prstGeom>
-          <a:noFill/>
-          <a:ln/>
-        </p:spPr>
-        <p:txBody>
-          <a:bodyPr wrap="square" lIns="0" tIns="0" rIns="0" bIns="0" rtlCol="0" anchor="ctr"/>
-          <a:lstStyle/>
-          <a:p>
-            <a:pPr indent="0" marL="0">
-              <a:buNone/>
-            </a:pPr>
-            <a:r>
-              <a:rPr lang="en-US" sz="1600" i="1" dirty="0">
-                <a:solidFill>
-                  <a:srgbClr val="9A6608"/>
-                </a:solidFill>
-                <a:latin typeface="Cambria" pitchFamily="34" charset="0"/>
-                <a:ea typeface="Cambria" pitchFamily="34" charset="-122"/>
-                <a:cs typeface="Cambria" pitchFamily="34" charset="-120"/>
-              </a:rPr>
-              <a:t>A system that claims a perfect score against its own adversarial suite is telling you about its suite, not its agent.</a:t>
-            </a:r>
-            <a:endParaRPr lang="en-US" sz="1600" dirty="0"/>
+                <a:latin typeface="Courier New" pitchFamily="34" charset="0"/>
+                <a:ea typeface="Courier New" pitchFamily="34" charset="-122"/>
+                <a:cs typeface="Courier New" pitchFamily="34" charset="-120"/>
+              </a:rPr>
+              <a:t>124 Apex   |   491 invariants   |   333 accessibility   |   131 Sa11y   |   28 contrast   |   16 reading level   |   all passing, every build</a:t>
+            </a:r>
+            <a:endParaRPr lang="en-US" sz="1200" dirty="0"/>
           </a:p>
         </p:txBody>
       </p:sp>
@@ -12153,6 +12243,467 @@
 <file path=ppt/slides/slide23.xml><?xml version="1.0" encoding="utf-8"?>
 <p:sld xmlns:a="http://schemas.openxmlformats.org/drawingml/2006/main" xmlns:r="http://schemas.openxmlformats.org/officeDocument/2006/relationships" xmlns:p="http://schemas.openxmlformats.org/presentationml/2006/main">
   <p:cSld name="Slide 23">
+    <p:bg>
+      <p:bgPr>
+        <a:solidFill>
+          <a:srgbClr val="F5F3ED"/>
+        </a:solidFill>
+      </p:bgPr>
+    </p:bg>
+    <p:spTree>
+      <p:nvGrpSpPr>
+        <p:cNvPr id="1" name=""/>
+        <p:cNvGrpSpPr/>
+        <p:nvPr/>
+      </p:nvGrpSpPr>
+      <p:grpSpPr>
+        <a:xfrm>
+          <a:off x="0" y="0"/>
+          <a:ext cx="0" cy="0"/>
+          <a:chOff x="0" y="0"/>
+          <a:chExt cx="0" cy="0"/>
+        </a:xfrm>
+      </p:grpSpPr>
+      <p:sp>
+        <p:nvSpPr>
+          <p:cNvPr id="2" name="Text 0"/>
+          <p:cNvSpPr txBox="1"/>
+          <p:nvPr/>
+        </p:nvSpPr>
+        <p:spPr>
+          <a:xfrm>
+            <a:off x="777240" y="384048"/>
+            <a:ext cx="7315200" cy="237744"/>
+          </a:xfrm>
+          <a:prstGeom prst="rect">
+            <a:avLst/>
+          </a:prstGeom>
+          <a:noFill/>
+          <a:ln/>
+        </p:spPr>
+        <p:txBody>
+          <a:bodyPr wrap="square" lIns="0" tIns="0" rIns="0" bIns="0" rtlCol="0" anchor="ctr"/>
+          <a:lstStyle/>
+          <a:p>
+            <a:pPr indent="0" marL="0">
+              <a:buNone/>
+            </a:pPr>
+            <a:r>
+              <a:rPr lang="en-US" sz="950" spc="170" kern="0" dirty="0">
+                <a:solidFill>
+                  <a:srgbClr val="656B71"/>
+                </a:solidFill>
+                <a:latin typeface="Courier New" pitchFamily="34" charset="0"/>
+                <a:ea typeface="Courier New" pitchFamily="34" charset="-122"/>
+                <a:cs typeface="Courier New" pitchFamily="34" charset="-120"/>
+              </a:rPr>
+              <a:t>04  THE HONEST PART</a:t>
+            </a:r>
+            <a:endParaRPr lang="en-US" sz="950" dirty="0"/>
+          </a:p>
+        </p:txBody>
+      </p:sp>
+      <p:sp>
+        <p:nvSpPr>
+          <p:cNvPr id="3" name="Text 1"/>
+          <p:cNvSpPr txBox="1"/>
+          <p:nvPr/>
+        </p:nvSpPr>
+        <p:spPr>
+          <a:xfrm>
+            <a:off x="777240" y="713232"/>
+            <a:ext cx="10607040" cy="914400"/>
+          </a:xfrm>
+          <a:prstGeom prst="rect">
+            <a:avLst/>
+          </a:prstGeom>
+          <a:noFill/>
+          <a:ln/>
+        </p:spPr>
+        <p:txBody>
+          <a:bodyPr wrap="square" lIns="0" tIns="0" rIns="0" bIns="0" rtlCol="0" anchor="ctr"/>
+          <a:lstStyle/>
+          <a:p>
+            <a:pPr indent="0" marL="0">
+              <a:buNone/>
+            </a:pPr>
+            <a:r>
+              <a:rPr lang="en-US" sz="3300" b="1" dirty="0">
+                <a:solidFill>
+                  <a:srgbClr val="14171A"/>
+                </a:solidFill>
+                <a:latin typeface="Cambria" pitchFamily="34" charset="0"/>
+                <a:ea typeface="Cambria" pitchFamily="34" charset="-122"/>
+                <a:cs typeface="Cambria" pitchFamily="34" charset="-120"/>
+              </a:rPr>
+              <a:t>What is still wrong.</a:t>
+            </a:r>
+            <a:endParaRPr lang="en-US" sz="3300" dirty="0"/>
+          </a:p>
+        </p:txBody>
+      </p:sp>
+      <p:sp>
+        <p:nvSpPr>
+          <p:cNvPr id="4" name="Text 2"/>
+          <p:cNvSpPr txBox="1"/>
+          <p:nvPr/>
+        </p:nvSpPr>
+        <p:spPr>
+          <a:xfrm>
+            <a:off x="777240" y="1783080"/>
+            <a:ext cx="4114800" cy="411480"/>
+          </a:xfrm>
+          <a:prstGeom prst="rect">
+            <a:avLst/>
+          </a:prstGeom>
+          <a:noFill/>
+          <a:ln/>
+        </p:spPr>
+        <p:txBody>
+          <a:bodyPr wrap="square" lIns="0" tIns="0" rIns="0" bIns="0" rtlCol="0" anchor="ctr"/>
+          <a:lstStyle/>
+          <a:p>
+            <a:pPr indent="0" marL="0">
+              <a:buNone/>
+            </a:pPr>
+            <a:r>
+              <a:rPr lang="en-US" sz="1350" b="1" dirty="0">
+                <a:solidFill>
+                  <a:srgbClr val="14171A"/>
+                </a:solidFill>
+                <a:latin typeface="Cambria" pitchFamily="34" charset="0"/>
+                <a:ea typeface="Cambria" pitchFamily="34" charset="-122"/>
+                <a:cs typeface="Cambria" pitchFamily="34" charset="-120"/>
+              </a:rPr>
+              <a:t>No screen-reader user has tested this.</a:t>
+            </a:r>
+            <a:endParaRPr lang="en-US" sz="1350" dirty="0"/>
+          </a:p>
+        </p:txBody>
+      </p:sp>
+      <p:sp>
+        <p:nvSpPr>
+          <p:cNvPr id="5" name="Text 3"/>
+          <p:cNvSpPr txBox="1"/>
+          <p:nvPr/>
+        </p:nvSpPr>
+        <p:spPr>
+          <a:xfrm>
+            <a:off x="5029200" y="1783080"/>
+            <a:ext cx="6355080" cy="868680"/>
+          </a:xfrm>
+          <a:prstGeom prst="rect">
+            <a:avLst/>
+          </a:prstGeom>
+          <a:noFill/>
+          <a:ln/>
+        </p:spPr>
+        <p:txBody>
+          <a:bodyPr wrap="square" lIns="0" tIns="0" rIns="0" bIns="0" rtlCol="0" anchor="ctr"/>
+          <a:lstStyle/>
+          <a:p>
+            <a:pPr indent="0" marL="0">
+              <a:buNone/>
+            </a:pPr>
+            <a:r>
+              <a:rPr lang="en-US" sz="1150" dirty="0">
+                <a:solidFill>
+                  <a:srgbClr val="42474C"/>
+                </a:solidFill>
+                <a:latin typeface="Calibri" pitchFamily="34" charset="0"/>
+                <a:ea typeface="Calibri" pitchFamily="34" charset="-122"/>
+                <a:cs typeface="Calibri" pitchFamily="34" charset="-120"/>
+              </a:rPr>
+              <a:t>Every accessibility claim is machine or browser verified, which is not the same as a person using it. One session with somebody who uses one daily is worth more than the next five features.</a:t>
+            </a:r>
+            <a:endParaRPr lang="en-US" sz="1150" dirty="0"/>
+          </a:p>
+        </p:txBody>
+      </p:sp>
+      <p:sp>
+        <p:nvSpPr>
+          <p:cNvPr id="6" name="Text 4"/>
+          <p:cNvSpPr txBox="1"/>
+          <p:nvPr/>
+        </p:nvSpPr>
+        <p:spPr>
+          <a:xfrm>
+            <a:off x="777240" y="2743200"/>
+            <a:ext cx="4114800" cy="411480"/>
+          </a:xfrm>
+          <a:prstGeom prst="rect">
+            <a:avLst/>
+          </a:prstGeom>
+          <a:noFill/>
+          <a:ln/>
+        </p:spPr>
+        <p:txBody>
+          <a:bodyPr wrap="square" lIns="0" tIns="0" rIns="0" bIns="0" rtlCol="0" anchor="ctr"/>
+          <a:lstStyle/>
+          <a:p>
+            <a:pPr indent="0" marL="0">
+              <a:buNone/>
+            </a:pPr>
+            <a:r>
+              <a:rPr lang="en-US" sz="1350" b="1" dirty="0">
+                <a:solidFill>
+                  <a:srgbClr val="14171A"/>
+                </a:solidFill>
+                <a:latin typeface="Cambria" pitchFamily="34" charset="0"/>
+                <a:ea typeface="Cambria" pitchFamily="34" charset="-122"/>
+                <a:cs typeface="Cambria" pitchFamily="34" charset="-120"/>
+              </a:rPr>
+              <a:t>The agent’s narration is nondeterministic.</a:t>
+            </a:r>
+            <a:endParaRPr lang="en-US" sz="1350" dirty="0"/>
+          </a:p>
+        </p:txBody>
+      </p:sp>
+      <p:sp>
+        <p:nvSpPr>
+          <p:cNvPr id="7" name="Text 5"/>
+          <p:cNvSpPr txBox="1"/>
+          <p:nvPr/>
+        </p:nvSpPr>
+        <p:spPr>
+          <a:xfrm>
+            <a:off x="5029200" y="2743200"/>
+            <a:ext cx="6355080" cy="868680"/>
+          </a:xfrm>
+          <a:prstGeom prst="rect">
+            <a:avLst/>
+          </a:prstGeom>
+          <a:noFill/>
+          <a:ln/>
+        </p:spPr>
+        <p:txBody>
+          <a:bodyPr wrap="square" lIns="0" tIns="0" rIns="0" bIns="0" rtlCol="0" anchor="ctr"/>
+          <a:lstStyle/>
+          <a:p>
+            <a:pPr indent="0" marL="0">
+              <a:buNone/>
+            </a:pPr>
+            <a:r>
+              <a:rPr lang="en-US" sz="1150" dirty="0">
+                <a:solidFill>
+                  <a:srgbClr val="42474C"/>
+                </a:solidFill>
+                <a:latin typeface="Calibri" pitchFamily="34" charset="0"/>
+                <a:ea typeface="Calibri" pitchFamily="34" charset="-122"/>
+                <a:cs typeface="Calibri" pitchFamily="34" charset="-120"/>
+              </a:rPr>
+              <a:t>It rewrites what an action returns rather than relaying it. Three separate fixes did not move it.</a:t>
+            </a:r>
+            <a:endParaRPr lang="en-US" sz="1150" dirty="0"/>
+          </a:p>
+        </p:txBody>
+      </p:sp>
+      <p:sp>
+        <p:nvSpPr>
+          <p:cNvPr id="8" name="Text 6"/>
+          <p:cNvSpPr txBox="1"/>
+          <p:nvPr/>
+        </p:nvSpPr>
+        <p:spPr>
+          <a:xfrm>
+            <a:off x="777240" y="3703320"/>
+            <a:ext cx="4114800" cy="411480"/>
+          </a:xfrm>
+          <a:prstGeom prst="rect">
+            <a:avLst/>
+          </a:prstGeom>
+          <a:noFill/>
+          <a:ln/>
+        </p:spPr>
+        <p:txBody>
+          <a:bodyPr wrap="square" lIns="0" tIns="0" rIns="0" bIns="0" rtlCol="0" anchor="ctr"/>
+          <a:lstStyle/>
+          <a:p>
+            <a:pPr indent="0" marL="0">
+              <a:buNone/>
+            </a:pPr>
+            <a:r>
+              <a:rPr lang="en-US" sz="1350" b="1" dirty="0">
+                <a:solidFill>
+                  <a:srgbClr val="14171A"/>
+                </a:solidFill>
+                <a:latin typeface="Cambria" pitchFamily="34" charset="0"/>
+                <a:ea typeface="Cambria" pitchFamily="34" charset="-122"/>
+                <a:cs typeface="Cambria" pitchFamily="34" charset="-120"/>
+              </a:rPr>
+              <a:t>Text messaging is not carrier registered.</a:t>
+            </a:r>
+            <a:endParaRPr lang="en-US" sz="1350" dirty="0"/>
+          </a:p>
+        </p:txBody>
+      </p:sp>
+      <p:sp>
+        <p:nvSpPr>
+          <p:cNvPr id="9" name="Text 7"/>
+          <p:cNvSpPr txBox="1"/>
+          <p:nvPr/>
+        </p:nvSpPr>
+        <p:spPr>
+          <a:xfrm>
+            <a:off x="5029200" y="3703320"/>
+            <a:ext cx="6355080" cy="868680"/>
+          </a:xfrm>
+          <a:prstGeom prst="rect">
+            <a:avLst/>
+          </a:prstGeom>
+          <a:noFill/>
+          <a:ln/>
+        </p:spPr>
+        <p:txBody>
+          <a:bodyPr wrap="square" lIns="0" tIns="0" rIns="0" bIns="0" rtlCol="0" anchor="ctr"/>
+          <a:lstStyle/>
+          <a:p>
+            <a:pPr indent="0" marL="0">
+              <a:buNone/>
+            </a:pPr>
+            <a:r>
+              <a:rPr lang="en-US" sz="1150" dirty="0">
+                <a:solidFill>
+                  <a:srgbClr val="42474C"/>
+                </a:solidFill>
+                <a:latin typeface="Calibri" pitchFamily="34" charset="0"/>
+                <a:ea typeface="Calibri" pitchFamily="34" charset="-122"/>
+                <a:cs typeface="Calibri" pitchFamily="34" charset="-120"/>
+              </a:rPr>
+              <a:t>A2P 10DLC gates SMS from a ten digit number. Voice on the same number needs none and works today.</a:t>
+            </a:r>
+            <a:endParaRPr lang="en-US" sz="1150" dirty="0"/>
+          </a:p>
+        </p:txBody>
+      </p:sp>
+      <p:sp>
+        <p:nvSpPr>
+          <p:cNvPr id="10" name="Text 8"/>
+          <p:cNvSpPr txBox="1"/>
+          <p:nvPr/>
+        </p:nvSpPr>
+        <p:spPr>
+          <a:xfrm>
+            <a:off x="777240" y="4663440"/>
+            <a:ext cx="4114800" cy="411480"/>
+          </a:xfrm>
+          <a:prstGeom prst="rect">
+            <a:avLst/>
+          </a:prstGeom>
+          <a:noFill/>
+          <a:ln/>
+        </p:spPr>
+        <p:txBody>
+          <a:bodyPr wrap="square" lIns="0" tIns="0" rIns="0" bIns="0" rtlCol="0" anchor="ctr"/>
+          <a:lstStyle/>
+          <a:p>
+            <a:pPr indent="0" marL="0">
+              <a:buNone/>
+            </a:pPr>
+            <a:r>
+              <a:rPr lang="en-US" sz="1350" b="1" dirty="0">
+                <a:solidFill>
+                  <a:srgbClr val="14171A"/>
+                </a:solidFill>
+                <a:latin typeface="Cambria" pitchFamily="34" charset="0"/>
+                <a:ea typeface="Cambria" pitchFamily="34" charset="-122"/>
+                <a:cs typeface="Cambria" pitchFamily="34" charset="-120"/>
+              </a:rPr>
+              <a:t>The Slack app has never met a real workspace.</a:t>
+            </a:r>
+            <a:endParaRPr lang="en-US" sz="1350" dirty="0"/>
+          </a:p>
+        </p:txBody>
+      </p:sp>
+      <p:sp>
+        <p:nvSpPr>
+          <p:cNvPr id="11" name="Text 9"/>
+          <p:cNvSpPr txBox="1"/>
+          <p:nvPr/>
+        </p:nvSpPr>
+        <p:spPr>
+          <a:xfrm>
+            <a:off x="5029200" y="4663440"/>
+            <a:ext cx="6355080" cy="868680"/>
+          </a:xfrm>
+          <a:prstGeom prst="rect">
+            <a:avLst/>
+          </a:prstGeom>
+          <a:noFill/>
+          <a:ln/>
+        </p:spPr>
+        <p:txBody>
+          <a:bodyPr wrap="square" lIns="0" tIns="0" rIns="0" bIns="0" rtlCol="0" anchor="ctr"/>
+          <a:lstStyle/>
+          <a:p>
+            <a:pPr indent="0" marL="0">
+              <a:buNone/>
+            </a:pPr>
+            <a:r>
+              <a:rPr lang="en-US" sz="1150" dirty="0">
+                <a:solidFill>
+                  <a:srgbClr val="42474C"/>
+                </a:solidFill>
+                <a:latin typeface="Calibri" pitchFamily="34" charset="0"/>
+                <a:ea typeface="Calibri" pitchFamily="34" charset="-122"/>
+                <a:cs typeface="Calibri" pitchFamily="34" charset="-120"/>
+              </a:rPr>
+              <a:t>The Apex behind it is live and verified. The handshake is not.</a:t>
+            </a:r>
+            <a:endParaRPr lang="en-US" sz="1150" dirty="0"/>
+          </a:p>
+        </p:txBody>
+      </p:sp>
+      <p:sp>
+        <p:nvSpPr>
+          <p:cNvPr id="12" name="Text 10"/>
+          <p:cNvSpPr txBox="1"/>
+          <p:nvPr/>
+        </p:nvSpPr>
+        <p:spPr>
+          <a:xfrm>
+            <a:off x="777240" y="5742432"/>
+            <a:ext cx="10698480" cy="603504"/>
+          </a:xfrm>
+          <a:prstGeom prst="rect">
+            <a:avLst/>
+          </a:prstGeom>
+          <a:noFill/>
+          <a:ln/>
+        </p:spPr>
+        <p:txBody>
+          <a:bodyPr wrap="square" lIns="0" tIns="0" rIns="0" bIns="0" rtlCol="0" anchor="ctr"/>
+          <a:lstStyle/>
+          <a:p>
+            <a:pPr indent="0" marL="0">
+              <a:buNone/>
+            </a:pPr>
+            <a:r>
+              <a:rPr lang="en-US" sz="1600" i="1" dirty="0">
+                <a:solidFill>
+                  <a:srgbClr val="9A6608"/>
+                </a:solidFill>
+                <a:latin typeface="Cambria" pitchFamily="34" charset="0"/>
+                <a:ea typeface="Cambria" pitchFamily="34" charset="-122"/>
+                <a:cs typeface="Cambria" pitchFamily="34" charset="-120"/>
+              </a:rPr>
+              <a:t>A system that claims a perfect score against its own adversarial suite is telling you about its suite, not its agent.</a:t>
+            </a:r>
+            <a:endParaRPr lang="en-US" sz="1600" dirty="0"/>
+          </a:p>
+        </p:txBody>
+      </p:sp>
+    </p:spTree>
+  </p:cSld>
+  <p:clrMapOvr>
+    <a:masterClrMapping/>
+  </p:clrMapOvr>
+</p:sld>
+</file>
+
+<file path=ppt/slides/slide24.xml><?xml version="1.0" encoding="utf-8"?>
+<p:sld xmlns:a="http://schemas.openxmlformats.org/drawingml/2006/main" xmlns:r="http://schemas.openxmlformats.org/officeDocument/2006/relationships" xmlns:p="http://schemas.openxmlformats.org/presentationml/2006/main">
+  <p:cSld name="Slide 24">
     <p:bg>
       <p:bgPr>
         <a:solidFill>

--- a/submission/Curb-Cut.pptx
+++ b/submission/Curb-Cut.pptx
@@ -14748,7 +14748,7 @@
                 <a:ea typeface="Courier New" pitchFamily="34" charset="-122"/>
                 <a:cs typeface="Courier New" pitchFamily="34" charset="-120"/>
               </a:rPr>
-              <a:t>124 Apex   |   491 invariants   |   333 accessibility   |   131 Sa11y   |   28 contrast   |   16 reading level   |   all passing, every build</a:t>
+              <a:t>124 Apex   |   494 invariants   |   333 accessibility   |   131 Sa11y   |   28 contrast   |   16 reading level   |   all passing, every build</a:t>
             </a:r>
             <a:endParaRPr lang="en-US" sz="1200" dirty="0"/>
           </a:p>
@@ -18187,7 +18187,7 @@
                 <a:ea typeface="Courier New" pitchFamily="34" charset="-122"/>
                 <a:cs typeface="Courier New" pitchFamily="34" charset="-120"/>
               </a:rPr>
-              <a:t>491</a:t>
+              <a:t>494</a:t>
             </a:r>
             <a:endParaRPr lang="en-US" sz="1600" dirty="0"/>
           </a:p>
@@ -19447,7 +19447,7 @@
                 <a:ea typeface="Courier New" pitchFamily="34" charset="-122"/>
                 <a:cs typeface="Courier New" pitchFamily="34" charset="-120"/>
               </a:rPr>
-              <a:t>python3 tests/invariants.py          491 checks</a:t>
+              <a:t>python3 tests/invariants.py          494 checks</a:t>
             </a:r>
             <a:endParaRPr lang="en-US" sz="1050" dirty="0"/>
           </a:p>

--- a/submission/Curb-Cut.pptx
+++ b/submission/Curb-Cut.pptx
@@ -6865,8 +6865,8 @@
         </p:nvSpPr>
         <p:spPr>
           <a:xfrm>
-            <a:off x="777240" y="1783080"/>
-            <a:ext cx="1371600" cy="658368"/>
+            <a:off x="777240" y="1773936"/>
+            <a:ext cx="1371600" cy="621792"/>
           </a:xfrm>
           <a:prstGeom prst="rect">
             <a:avLst/>
@@ -6890,7 +6890,7 @@
         </p:nvSpPr>
         <p:spPr>
           <a:xfrm>
-            <a:off x="777240" y="1984248"/>
+            <a:off x="777240" y="1975104"/>
             <a:ext cx="1371600" cy="274320"/>
           </a:xfrm>
           <a:prstGeom prst="rect">
@@ -6929,8 +6929,8 @@
         </p:nvSpPr>
         <p:spPr>
           <a:xfrm>
-            <a:off x="2240280" y="1783080"/>
-            <a:ext cx="9144000" cy="658368"/>
+            <a:off x="2240280" y="1773936"/>
+            <a:ext cx="9144000" cy="621792"/>
           </a:xfrm>
           <a:prstGeom prst="rect">
             <a:avLst/>
@@ -6954,7 +6954,7 @@
         </p:nvSpPr>
         <p:spPr>
           <a:xfrm>
-            <a:off x="2450592" y="1984248"/>
+            <a:off x="2450592" y="1975104"/>
             <a:ext cx="8778240" cy="320040"/>
           </a:xfrm>
           <a:prstGeom prst="rect">
@@ -6993,8 +6993,8 @@
         </p:nvSpPr>
         <p:spPr>
           <a:xfrm>
-            <a:off x="3108960" y="2441448"/>
-            <a:ext cx="0" cy="182880"/>
+            <a:off x="3108960" y="2395728"/>
+            <a:ext cx="0" cy="155448"/>
           </a:xfrm>
           <a:prstGeom prst="line">
             <a:avLst/>
@@ -7017,8 +7017,8 @@
         </p:nvSpPr>
         <p:spPr>
           <a:xfrm>
-            <a:off x="777240" y="2624328"/>
-            <a:ext cx="1371600" cy="658368"/>
+            <a:off x="777240" y="2551176"/>
+            <a:ext cx="1371600" cy="621792"/>
           </a:xfrm>
           <a:prstGeom prst="rect">
             <a:avLst/>
@@ -7042,7 +7042,7 @@
         </p:nvSpPr>
         <p:spPr>
           <a:xfrm>
-            <a:off x="777240" y="2825496"/>
+            <a:off x="777240" y="2752344"/>
             <a:ext cx="1371600" cy="274320"/>
           </a:xfrm>
           <a:prstGeom prst="rect">
@@ -7081,8 +7081,8 @@
         </p:nvSpPr>
         <p:spPr>
           <a:xfrm>
-            <a:off x="2240280" y="2624328"/>
-            <a:ext cx="9144000" cy="658368"/>
+            <a:off x="2240280" y="2551176"/>
+            <a:ext cx="9144000" cy="621792"/>
           </a:xfrm>
           <a:prstGeom prst="rect">
             <a:avLst/>
@@ -7106,7 +7106,7 @@
         </p:nvSpPr>
         <p:spPr>
           <a:xfrm>
-            <a:off x="2450592" y="2825496"/>
+            <a:off x="2450592" y="2752344"/>
             <a:ext cx="8778240" cy="320040"/>
           </a:xfrm>
           <a:prstGeom prst="rect">
@@ -7145,8 +7145,8 @@
         </p:nvSpPr>
         <p:spPr>
           <a:xfrm>
-            <a:off x="3108960" y="3282696"/>
-            <a:ext cx="0" cy="182880"/>
+            <a:off x="3108960" y="3172968"/>
+            <a:ext cx="0" cy="155448"/>
           </a:xfrm>
           <a:prstGeom prst="line">
             <a:avLst/>
@@ -7169,8 +7169,8 @@
         </p:nvSpPr>
         <p:spPr>
           <a:xfrm>
-            <a:off x="777240" y="3465576"/>
-            <a:ext cx="1371600" cy="658368"/>
+            <a:off x="777240" y="3328416"/>
+            <a:ext cx="1371600" cy="621792"/>
           </a:xfrm>
           <a:prstGeom prst="rect">
             <a:avLst/>
@@ -7194,7 +7194,7 @@
         </p:nvSpPr>
         <p:spPr>
           <a:xfrm>
-            <a:off x="777240" y="3666744"/>
+            <a:off x="777240" y="3529584"/>
             <a:ext cx="1371600" cy="274320"/>
           </a:xfrm>
           <a:prstGeom prst="rect">
@@ -7233,8 +7233,8 @@
         </p:nvSpPr>
         <p:spPr>
           <a:xfrm>
-            <a:off x="2240280" y="3465576"/>
-            <a:ext cx="9144000" cy="658368"/>
+            <a:off x="2240280" y="3328416"/>
+            <a:ext cx="9144000" cy="621792"/>
           </a:xfrm>
           <a:prstGeom prst="rect">
             <a:avLst/>
@@ -7258,7 +7258,7 @@
         </p:nvSpPr>
         <p:spPr>
           <a:xfrm>
-            <a:off x="2450592" y="3666744"/>
+            <a:off x="2450592" y="3529584"/>
             <a:ext cx="8778240" cy="320040"/>
           </a:xfrm>
           <a:prstGeom prst="rect">
@@ -7297,8 +7297,8 @@
         </p:nvSpPr>
         <p:spPr>
           <a:xfrm>
-            <a:off x="3108960" y="4123944"/>
-            <a:ext cx="0" cy="182880"/>
+            <a:off x="3108960" y="3950208"/>
+            <a:ext cx="0" cy="155448"/>
           </a:xfrm>
           <a:prstGeom prst="line">
             <a:avLst/>
@@ -7321,8 +7321,8 @@
         </p:nvSpPr>
         <p:spPr>
           <a:xfrm>
-            <a:off x="777240" y="4306824"/>
-            <a:ext cx="1371600" cy="658368"/>
+            <a:off x="777240" y="4105656"/>
+            <a:ext cx="1371600" cy="621792"/>
           </a:xfrm>
           <a:prstGeom prst="rect">
             <a:avLst/>
@@ -7346,7 +7346,7 @@
         </p:nvSpPr>
         <p:spPr>
           <a:xfrm>
-            <a:off x="777240" y="4507992"/>
+            <a:off x="777240" y="4306824"/>
             <a:ext cx="1371600" cy="274320"/>
           </a:xfrm>
           <a:prstGeom prst="rect">
@@ -7385,8 +7385,8 @@
         </p:nvSpPr>
         <p:spPr>
           <a:xfrm>
-            <a:off x="2240280" y="4306824"/>
-            <a:ext cx="9144000" cy="658368"/>
+            <a:off x="2240280" y="4105656"/>
+            <a:ext cx="9144000" cy="621792"/>
           </a:xfrm>
           <a:prstGeom prst="rect">
             <a:avLst/>
@@ -7410,7 +7410,7 @@
         </p:nvSpPr>
         <p:spPr>
           <a:xfrm>
-            <a:off x="2450592" y="4507992"/>
+            <a:off x="2450592" y="4306824"/>
             <a:ext cx="8778240" cy="320040"/>
           </a:xfrm>
           <a:prstGeom prst="rect">
@@ -7449,8 +7449,8 @@
         </p:nvSpPr>
         <p:spPr>
           <a:xfrm>
-            <a:off x="3108960" y="4965192"/>
-            <a:ext cx="0" cy="182880"/>
+            <a:off x="3108960" y="4727448"/>
+            <a:ext cx="0" cy="155448"/>
           </a:xfrm>
           <a:prstGeom prst="line">
             <a:avLst/>
@@ -7473,8 +7473,8 @@
         </p:nvSpPr>
         <p:spPr>
           <a:xfrm>
-            <a:off x="777240" y="5148072"/>
-            <a:ext cx="1371600" cy="658368"/>
+            <a:off x="777240" y="4882896"/>
+            <a:ext cx="1371600" cy="621792"/>
           </a:xfrm>
           <a:prstGeom prst="rect">
             <a:avLst/>
@@ -7498,7 +7498,7 @@
         </p:nvSpPr>
         <p:spPr>
           <a:xfrm>
-            <a:off x="777240" y="5349240"/>
+            <a:off x="777240" y="5084064"/>
             <a:ext cx="1371600" cy="274320"/>
           </a:xfrm>
           <a:prstGeom prst="rect">
@@ -7537,8 +7537,8 @@
         </p:nvSpPr>
         <p:spPr>
           <a:xfrm>
-            <a:off x="2240280" y="5148072"/>
-            <a:ext cx="9144000" cy="658368"/>
+            <a:off x="2240280" y="4882896"/>
+            <a:ext cx="9144000" cy="621792"/>
           </a:xfrm>
           <a:prstGeom prst="rect">
             <a:avLst/>
@@ -7562,7 +7562,7 @@
         </p:nvSpPr>
         <p:spPr>
           <a:xfrm>
-            <a:off x="2450592" y="5349240"/>
+            <a:off x="2450592" y="5084064"/>
             <a:ext cx="8778240" cy="320040"/>
           </a:xfrm>
           <a:prstGeom prst="rect">
@@ -7750,8 +7750,8 @@
         </p:nvSpPr>
         <p:spPr>
           <a:xfrm>
-            <a:off x="777240" y="1810512"/>
-            <a:ext cx="502920" cy="676656"/>
+            <a:off x="777240" y="1792224"/>
+            <a:ext cx="502920" cy="621792"/>
           </a:xfrm>
           <a:prstGeom prst="rect">
             <a:avLst/>
@@ -7775,7 +7775,7 @@
         </p:nvSpPr>
         <p:spPr>
           <a:xfrm>
-            <a:off x="777240" y="1993392"/>
+            <a:off x="777240" y="1975104"/>
             <a:ext cx="502920" cy="292608"/>
           </a:xfrm>
           <a:prstGeom prst="rect">
@@ -7814,7 +7814,7 @@
         </p:nvSpPr>
         <p:spPr>
           <a:xfrm>
-            <a:off x="1417320" y="2002536"/>
+            <a:off x="1417320" y="1984248"/>
             <a:ext cx="1371600" cy="292608"/>
           </a:xfrm>
           <a:prstGeom prst="rect">
@@ -7853,8 +7853,8 @@
         </p:nvSpPr>
         <p:spPr>
           <a:xfrm>
-            <a:off x="2880360" y="1810512"/>
-            <a:ext cx="8503920" cy="676656"/>
+            <a:off x="2880360" y="1792224"/>
+            <a:ext cx="8503920" cy="621792"/>
           </a:xfrm>
           <a:prstGeom prst="rect">
             <a:avLst/>
@@ -7878,7 +7878,7 @@
         </p:nvSpPr>
         <p:spPr>
           <a:xfrm>
-            <a:off x="3090672" y="1993392"/>
+            <a:off x="3090672" y="1975104"/>
             <a:ext cx="8138160" cy="365760"/>
           </a:xfrm>
           <a:prstGeom prst="rect">
@@ -7917,8 +7917,8 @@
         </p:nvSpPr>
         <p:spPr>
           <a:xfrm>
-            <a:off x="1024128" y="2487168"/>
-            <a:ext cx="0" cy="164592"/>
+            <a:off x="1024128" y="2414016"/>
+            <a:ext cx="0" cy="155448"/>
           </a:xfrm>
           <a:prstGeom prst="line">
             <a:avLst/>
@@ -7941,8 +7941,8 @@
         </p:nvSpPr>
         <p:spPr>
           <a:xfrm>
-            <a:off x="777240" y="2651760"/>
-            <a:ext cx="502920" cy="676656"/>
+            <a:off x="777240" y="2569464"/>
+            <a:ext cx="502920" cy="621792"/>
           </a:xfrm>
           <a:prstGeom prst="rect">
             <a:avLst/>
@@ -7966,7 +7966,7 @@
         </p:nvSpPr>
         <p:spPr>
           <a:xfrm>
-            <a:off x="777240" y="2834640"/>
+            <a:off x="777240" y="2752344"/>
             <a:ext cx="502920" cy="292608"/>
           </a:xfrm>
           <a:prstGeom prst="rect">
@@ -8005,7 +8005,7 @@
         </p:nvSpPr>
         <p:spPr>
           <a:xfrm>
-            <a:off x="1417320" y="2843784"/>
+            <a:off x="1417320" y="2761488"/>
             <a:ext cx="1371600" cy="292608"/>
           </a:xfrm>
           <a:prstGeom prst="rect">
@@ -8044,8 +8044,8 @@
         </p:nvSpPr>
         <p:spPr>
           <a:xfrm>
-            <a:off x="2880360" y="2651760"/>
-            <a:ext cx="8503920" cy="676656"/>
+            <a:off x="2880360" y="2569464"/>
+            <a:ext cx="8503920" cy="621792"/>
           </a:xfrm>
           <a:prstGeom prst="rect">
             <a:avLst/>
@@ -8069,7 +8069,7 @@
         </p:nvSpPr>
         <p:spPr>
           <a:xfrm>
-            <a:off x="3090672" y="2834640"/>
+            <a:off x="3090672" y="2752344"/>
             <a:ext cx="8138160" cy="365760"/>
           </a:xfrm>
           <a:prstGeom prst="rect">
@@ -8108,8 +8108,8 @@
         </p:nvSpPr>
         <p:spPr>
           <a:xfrm>
-            <a:off x="1024128" y="3328416"/>
-            <a:ext cx="0" cy="164592"/>
+            <a:off x="1024128" y="3191256"/>
+            <a:ext cx="0" cy="155448"/>
           </a:xfrm>
           <a:prstGeom prst="line">
             <a:avLst/>
@@ -8132,8 +8132,8 @@
         </p:nvSpPr>
         <p:spPr>
           <a:xfrm>
-            <a:off x="777240" y="3493008"/>
-            <a:ext cx="502920" cy="676656"/>
+            <a:off x="777240" y="3346704"/>
+            <a:ext cx="502920" cy="621792"/>
           </a:xfrm>
           <a:prstGeom prst="rect">
             <a:avLst/>
@@ -8157,7 +8157,7 @@
         </p:nvSpPr>
         <p:spPr>
           <a:xfrm>
-            <a:off x="777240" y="3675888"/>
+            <a:off x="777240" y="3529584"/>
             <a:ext cx="502920" cy="292608"/>
           </a:xfrm>
           <a:prstGeom prst="rect">
@@ -8196,7 +8196,7 @@
         </p:nvSpPr>
         <p:spPr>
           <a:xfrm>
-            <a:off x="1417320" y="3685032"/>
+            <a:off x="1417320" y="3538728"/>
             <a:ext cx="1371600" cy="292608"/>
           </a:xfrm>
           <a:prstGeom prst="rect">
@@ -8235,8 +8235,8 @@
         </p:nvSpPr>
         <p:spPr>
           <a:xfrm>
-            <a:off x="2880360" y="3493008"/>
-            <a:ext cx="8503920" cy="676656"/>
+            <a:off x="2880360" y="3346704"/>
+            <a:ext cx="8503920" cy="621792"/>
           </a:xfrm>
           <a:prstGeom prst="rect">
             <a:avLst/>
@@ -8260,7 +8260,7 @@
         </p:nvSpPr>
         <p:spPr>
           <a:xfrm>
-            <a:off x="3090672" y="3675888"/>
+            <a:off x="3090672" y="3529584"/>
             <a:ext cx="8138160" cy="365760"/>
           </a:xfrm>
           <a:prstGeom prst="rect">
@@ -8299,8 +8299,8 @@
         </p:nvSpPr>
         <p:spPr>
           <a:xfrm>
-            <a:off x="1024128" y="4169664"/>
-            <a:ext cx="0" cy="164592"/>
+            <a:off x="1024128" y="3968496"/>
+            <a:ext cx="0" cy="155448"/>
           </a:xfrm>
           <a:prstGeom prst="line">
             <a:avLst/>
@@ -8323,8 +8323,8 @@
         </p:nvSpPr>
         <p:spPr>
           <a:xfrm>
-            <a:off x="777240" y="4334256"/>
-            <a:ext cx="502920" cy="676656"/>
+            <a:off x="777240" y="4123944"/>
+            <a:ext cx="502920" cy="621792"/>
           </a:xfrm>
           <a:prstGeom prst="rect">
             <a:avLst/>
@@ -8348,7 +8348,7 @@
         </p:nvSpPr>
         <p:spPr>
           <a:xfrm>
-            <a:off x="777240" y="4517136"/>
+            <a:off x="777240" y="4306824"/>
             <a:ext cx="502920" cy="292608"/>
           </a:xfrm>
           <a:prstGeom prst="rect">
@@ -8387,7 +8387,7 @@
         </p:nvSpPr>
         <p:spPr>
           <a:xfrm>
-            <a:off x="1417320" y="4526280"/>
+            <a:off x="1417320" y="4315968"/>
             <a:ext cx="1371600" cy="292608"/>
           </a:xfrm>
           <a:prstGeom prst="rect">
@@ -8426,8 +8426,8 @@
         </p:nvSpPr>
         <p:spPr>
           <a:xfrm>
-            <a:off x="2880360" y="4334256"/>
-            <a:ext cx="8503920" cy="676656"/>
+            <a:off x="2880360" y="4123944"/>
+            <a:ext cx="8503920" cy="621792"/>
           </a:xfrm>
           <a:prstGeom prst="rect">
             <a:avLst/>
@@ -8451,7 +8451,7 @@
         </p:nvSpPr>
         <p:spPr>
           <a:xfrm>
-            <a:off x="3090672" y="4517136"/>
+            <a:off x="3090672" y="4306824"/>
             <a:ext cx="8138160" cy="365760"/>
           </a:xfrm>
           <a:prstGeom prst="rect">
@@ -8490,8 +8490,8 @@
         </p:nvSpPr>
         <p:spPr>
           <a:xfrm>
-            <a:off x="1024128" y="5010912"/>
-            <a:ext cx="0" cy="164592"/>
+            <a:off x="1024128" y="4745736"/>
+            <a:ext cx="0" cy="155448"/>
           </a:xfrm>
           <a:prstGeom prst="line">
             <a:avLst/>
@@ -8514,8 +8514,8 @@
         </p:nvSpPr>
         <p:spPr>
           <a:xfrm>
-            <a:off x="777240" y="5175504"/>
-            <a:ext cx="502920" cy="676656"/>
+            <a:off x="777240" y="4901184"/>
+            <a:ext cx="502920" cy="621792"/>
           </a:xfrm>
           <a:prstGeom prst="rect">
             <a:avLst/>
@@ -8539,7 +8539,7 @@
         </p:nvSpPr>
         <p:spPr>
           <a:xfrm>
-            <a:off x="777240" y="5358384"/>
+            <a:off x="777240" y="5084064"/>
             <a:ext cx="502920" cy="292608"/>
           </a:xfrm>
           <a:prstGeom prst="rect">
@@ -8578,7 +8578,7 @@
         </p:nvSpPr>
         <p:spPr>
           <a:xfrm>
-            <a:off x="1417320" y="5367528"/>
+            <a:off x="1417320" y="5093208"/>
             <a:ext cx="1371600" cy="292608"/>
           </a:xfrm>
           <a:prstGeom prst="rect">
@@ -8617,8 +8617,8 @@
         </p:nvSpPr>
         <p:spPr>
           <a:xfrm>
-            <a:off x="2880360" y="5175504"/>
-            <a:ext cx="8503920" cy="676656"/>
+            <a:off x="2880360" y="4901184"/>
+            <a:ext cx="8503920" cy="621792"/>
           </a:xfrm>
           <a:prstGeom prst="rect">
             <a:avLst/>
@@ -8642,7 +8642,7 @@
         </p:nvSpPr>
         <p:spPr>
           <a:xfrm>
-            <a:off x="3090672" y="5358384"/>
+            <a:off x="3090672" y="5084064"/>
             <a:ext cx="8138160" cy="365760"/>
           </a:xfrm>
           <a:prstGeom prst="rect">
@@ -16532,8 +16532,8 @@
         </p:nvSpPr>
         <p:spPr>
           <a:xfrm>
-            <a:off x="777240" y="5175504"/>
-            <a:ext cx="10607040" cy="603504"/>
+            <a:off x="777240" y="5084064"/>
+            <a:ext cx="10607040" cy="566928"/>
           </a:xfrm>
           <a:prstGeom prst="rect">
             <a:avLst/>

--- a/submission/Curb-Cut.pptx
+++ b/submission/Curb-Cut.pptx
@@ -1502,7 +1502,7 @@
           <a:p>
             <a:r>
               <a:rPr lang="en-US" dirty="0"/>
-              <a:t>Say the first line, then pause. Let people actually remember. Do not rush to the second line. Nobody needs a citation for this one because everybody has lived it.</a:t>
+              <a:t>Say the first line, then pause. Let people actually remember. Don't rush to the second line. Nobody needs a citation for this one because everybody has lived it.</a:t>
             </a:r>
             <a:endParaRPr lang="en-US" dirty="0"/>
           </a:p>
@@ -2910,7 +2910,7 @@
           <a:p>
             <a:r>
               <a:rPr lang="en-US" dirty="0"/>
-              <a:t>This is the moral argument. Do not rush it and do not soften it.</a:t>
+              <a:t>This is the moral argument. Don't rush it and don't soften it.</a:t>
             </a:r>
             <a:endParaRPr lang="en-US" dirty="0"/>
           </a:p>
@@ -3174,7 +3174,7 @@
           <a:p>
             <a:r>
               <a:rPr lang="en-US" dirty="0"/>
-              <a:t>This is the sentence the standing preference exists for. Call back to it later. If asked about the date: the gap it describes was measured again by Statistics Canada in 2022 and by the US Bureau of Labor Statistics in 2025, and it has not closed.</a:t>
+              <a:t>This is the sentence the standing preference exists for. Call back to it later. If asked about the date: the gap it describes was measured again by Statistics Canada in 2022 and by the US Bureau of Labor Statistics in 2025, and it hasn't closed.</a:t>
             </a:r>
             <a:endParaRPr lang="en-US" dirty="0"/>
           </a:p>
@@ -6681,7 +6681,7 @@
                 <a:ea typeface="Cambria" pitchFamily="34" charset="-122"/>
                 <a:cs typeface="Cambria" pitchFamily="34" charset="-120"/>
               </a:rPr>
-              <a:t>The gap is not a spending gap. It is a process gap, which is cheaper to close and harder to sell, because no budget line says "the asking was too hard".</a:t>
+              <a:t>The gap isn't a spending gap. It is a process gap, which is cheaper to close and harder to sell, because no budget line says "the asking was too hard".</a:t>
             </a:r>
             <a:endParaRPr lang="en-US" sz="1600" dirty="0"/>
           </a:p>
@@ -8250,7 +8250,7 @@
                 <a:ea typeface="Calibri" pitchFamily="34" charset="-122"/>
                 <a:cs typeface="Calibri" pitchFamily="34" charset="-120"/>
               </a:rPr>
-              <a:t>Six classes write to it. None can write a body, because there is no field for one. Five reports and one dashboard sit on top of it for the person on duty: who is waiting, what did not arrive, who needs an interpreter.</a:t>
+              <a:t>Six classes write to it. None can write a body, because there's no field for one. Five reports and one dashboard sit on top of it for the person on duty: who is waiting, what didn't arrive, who needs an interpreter.</a:t>
             </a:r>
             <a:endParaRPr lang="en-US" sz="1350" dirty="0"/>
           </a:p>
@@ -9408,7 +9408,7 @@
                 <a:ea typeface="Cambria" pitchFamily="34" charset="-122"/>
                 <a:cs typeface="Cambria" pitchFamily="34" charset="-120"/>
               </a:rPr>
-              <a:t>Steps one to four contain no inference at all. The cheapest system is the one that does not ask a model a question it already knows the answer to.</a:t>
+              <a:t>Steps one to four contain no inference at all. The cheapest system is the one that doesn't ask a model a question it already knows the answer to.</a:t>
             </a:r>
             <a:endParaRPr lang="en-US" sz="1600" dirty="0"/>
           </a:p>
@@ -11291,7 +11291,7 @@
                 <a:ea typeface="Cambria" pitchFamily="34" charset="-122"/>
                 <a:cs typeface="Cambria" pitchFamily="34" charset="-120"/>
               </a:rPr>
-              <a:t>Email and Slack deliberately will not send. Agreeing in writing days later is not the same as choosing in the moment.</a:t>
+              <a:t>Email and Slack deliberately won't send. Agreeing in writing days later isn't the same as choosing in the moment.</a:t>
             </a:r>
             <a:endParaRPr lang="en-US" sz="1600" dirty="0"/>
           </a:p>
@@ -12268,7 +12268,7 @@
                 <a:ea typeface="Cambria" pitchFamily="34" charset="-122"/>
                 <a:cs typeface="Cambria" pitchFamily="34" charset="-120"/>
               </a:rPr>
-              <a:t>There is no field for a diagnosis.</a:t>
+              <a:t>There's no field for a diagnosis.</a:t>
             </a:r>
             <a:endParaRPr lang="en-US" sz="3300" dirty="0"/>
           </a:p>
@@ -12910,7 +12910,7 @@
                 <a:ea typeface="Calibri" pitchFamily="34" charset="-122"/>
                 <a:cs typeface="Calibri" pitchFamily="34" charset="-120"/>
               </a:rPr>
-              <a:t>You worked out what it would take to ask. Who you would have to tell. How it would sound. And you decided it was not worth the conversation.</a:t>
+              <a:t>You worked out what it would take to ask. Who you would have to tell. How it would sound. And you decided it wasn't worth the conversation.</a:t>
             </a:r>
             <a:endParaRPr lang="en-US" sz="2100" dirty="0"/>
           </a:p>
@@ -13176,7 +13176,7 @@
                 <a:ea typeface="Calibri" pitchFamily="34" charset="-122"/>
                 <a:cs typeface="Calibri" pitchFamily="34" charset="-120"/>
               </a:rPr>
-              <a:t>There is no field for a diagnosis, condition, disability type, medical note, severity or prognosis anywhere in this system. Nobody holds that, including the person who built it, and the person you are helping was never asked.</a:t>
+              <a:t>There's no field for a diagnosis, condition, disability type, medical note, severity or prognosis anywhere in this system. Nobody holds that, including the person who built it, and the person you are helping was never asked.</a:t>
             </a:r>
             <a:endParaRPr lang="en-US" sz="1550" dirty="0"/>
           </a:p>
@@ -13616,7 +13616,7 @@
                 <a:ea typeface="Calibri" pitchFamily="34" charset="-122"/>
                 <a:cs typeface="Calibri" pitchFamily="34" charset="-120"/>
               </a:rPr>
-              <a:t>Six control words were printed in our own copy and routed nowhere. The word that withdraws a disclosure returned "I do not have good information on that", and the sharing stayed on.</a:t>
+              <a:t>Six control words were printed in our own copy and routed nowhere. The word that withdraws a disclosure returned "I don't have good information on that", and the sharing stayed on.</a:t>
             </a:r>
             <a:endParaRPr lang="en-US" sz="1200" dirty="0"/>
           </a:p>
@@ -13719,7 +13719,7 @@
                 <a:ea typeface="Calibri" pitchFamily="34" charset="-122"/>
                 <a:cs typeface="Calibri" pitchFamily="34" charset="-120"/>
               </a:rPr>
-              <a:t>It said a volunteered condition "is not written to any record". It was stored word for word. Now stripped before the insert, with the claim rewritten to state its limit.</a:t>
+              <a:t>It said a volunteered condition "isn't written to any record". It was stored word for word. Now stripped before the insert, with the claim rewritten to state its limit.</a:t>
             </a:r>
             <a:endParaRPr lang="en-US" sz="1200" dirty="0"/>
           </a:p>
@@ -13971,7 +13971,7 @@
                 <a:ea typeface="Cambria" pitchFamily="34" charset="-122"/>
                 <a:cs typeface="Cambria" pitchFamily="34" charset="-120"/>
               </a:rPr>
-              <a:t>The tool could not decide the thing that mattered.</a:t>
+              <a:t>The tool couldn't decide the thing that mattered.</a:t>
             </a:r>
             <a:endParaRPr lang="en-US" sz="3300" dirty="0"/>
           </a:p>
@@ -14181,7 +14181,7 @@
                 <a:ea typeface="Calibri" pitchFamily="34" charset="-122"/>
                 <a:cs typeface="Calibri" pitchFamily="34" charset="-120"/>
               </a:rPr>
-              <a:t>On the signed video, WCAG 1.2.2 came back incomplete, not pass. Inside a test runner axe cannot inspect media. So it could not settle it. A person using a screen reader would have settled it immediately.</a:t>
+              <a:t>On the signed video, WCAG 1.2.2 came back incomplete, not pass. Inside a test runner axe can't inspect media. So it couldn't settle it. A person using a screen reader would have settled it immediately.</a:t>
             </a:r>
             <a:endParaRPr lang="en-US" sz="1200" dirty="0"/>
           </a:p>
@@ -14220,7 +14220,7 @@
                 <a:ea typeface="Calibri" pitchFamily="34" charset="-122"/>
                 <a:cs typeface="Calibri" pitchFamily="34" charset="-120"/>
               </a:rPr>
-              <a:t>The obvious remedy was the forbidden one. That video is usually a Deaf person signing, and a machine caption would put words in somebody’s mouth about their own body, then file them. So the video now says so itself, to the person who cannot watch it:</a:t>
+              <a:t>The obvious remedy was the forbidden one. That video is usually a Deaf person signing, and a machine caption would put words in somebody’s mouth about their own body, then file them. So the video now says so itself, to the person who can't watch it:</a:t>
             </a:r>
             <a:endParaRPr lang="en-US" sz="1350" dirty="0"/>
           </a:p>
@@ -14323,7 +14323,7 @@
                 <a:ea typeface="Cambria" pitchFamily="34" charset="-122"/>
                 <a:cs typeface="Cambria" pitchFamily="34" charset="-120"/>
               </a:rPr>
-              <a:t>An incomplete is not a pass. Reporting it as one would have been the easiest lie in the submission.</a:t>
+              <a:t>An incomplete isn't a pass. Reporting it as one would have been the easiest lie in the submission.</a:t>
             </a:r>
             <a:endParaRPr lang="en-US" sz="1600" dirty="0"/>
           </a:p>
@@ -14433,7 +14433,7 @@
                 <a:ea typeface="Cambria" pitchFamily="34" charset="-122"/>
                 <a:cs typeface="Cambria" pitchFamily="34" charset="-120"/>
               </a:rPr>
-              <a:t>Our own repository could not rebuild us.</a:t>
+              <a:t>Our own repository couldn't rebuild us.</a:t>
             </a:r>
             <a:endParaRPr lang="en-US" sz="3300" dirty="0"/>
           </a:p>
@@ -14975,7 +14975,7 @@
                 <a:ea typeface="Calibri" pitchFamily="34" charset="-122"/>
                 <a:cs typeface="Calibri" pitchFamily="34" charset="-120"/>
               </a:rPr>
-              <a:t>It also produced a finding we withdrew. A check demanded every row state a cost; nine do not. But the code was already right: it says it has no figure and refuses to estimate one. We corrected the check, not the code, and left it in the file with a note that it was wrong the first time.</a:t>
+              <a:t>It also produced a finding we withdrew. A check demanded every row state a cost; nine don't. But the code was already right: it says it has no figure and refuses to estimate one. We corrected the check, not the code, and left it in the file with a note that it was wrong the first time.</a:t>
             </a:r>
             <a:endParaRPr lang="en-US" sz="1250" dirty="0"/>
           </a:p>
@@ -15226,7 +15226,7 @@
                 <a:ea typeface="Calibri" pitchFamily="34" charset="-122"/>
                 <a:cs typeface="Calibri" pitchFamily="34" charset="-120"/>
               </a:rPr>
-              <a:t>the agent does not reliably say out loud that it discarded a volunteered condition</a:t>
+              <a:t>the agent doesn't reliably say out loud that it discarded a volunteered condition</a:t>
             </a:r>
             <a:endParaRPr lang="en-US" sz="1400" dirty="0"/>
           </a:p>
@@ -15450,7 +15450,7 @@
                 <a:ea typeface="Courier New" pitchFamily="34" charset="-122"/>
                 <a:cs typeface="Courier New" pitchFamily="34" charset="-120"/>
               </a:rPr>
-              <a:t>124 Apex   |   494 invariants   |   333 accessibility   |   131 Sa11y   |   28 contrast   |   16 reading level   |   all passing, every build</a:t>
+              <a:t>137 Apex   |   508 invariants   |   333 accessibility   |   131 Sa11y   |   28 contrast   |   16 reading level   |   all passing, every build</a:t>
             </a:r>
             <a:endParaRPr lang="en-US" sz="1200" dirty="0"/>
           </a:p>
@@ -15638,7 +15638,7 @@
                 <a:ea typeface="Calibri" pitchFamily="34" charset="-122"/>
                 <a:cs typeface="Calibri" pitchFamily="34" charset="-120"/>
               </a:rPr>
-              <a:t>Every accessibility claim is machine or browser verified, which is not the same as a person using it. One session with somebody who uses one daily is worth more than the next five features.</a:t>
+              <a:t>Every accessibility claim is machine or browser verified, which isn't the same as a person using it. One session with somebody who uses one daily is worth more than the next five features.</a:t>
             </a:r>
             <a:endParaRPr lang="en-US" sz="1150" dirty="0"/>
           </a:p>
@@ -15716,7 +15716,7 @@
                 <a:ea typeface="Calibri" pitchFamily="34" charset="-122"/>
                 <a:cs typeface="Calibri" pitchFamily="34" charset="-120"/>
               </a:rPr>
-              <a:t>It rewrites what an action returns rather than relaying it. Three separate fixes did not move it.</a:t>
+              <a:t>It rewrites what an action returns rather than relaying it. Three separate fixes didn't move it.</a:t>
             </a:r>
             <a:endParaRPr lang="en-US" sz="1150" dirty="0"/>
           </a:p>
@@ -15755,7 +15755,7 @@
                 <a:ea typeface="Cambria" pitchFamily="34" charset="-122"/>
                 <a:cs typeface="Cambria" pitchFamily="34" charset="-120"/>
               </a:rPr>
-              <a:t>Text messaging is not carrier registered.</a:t>
+              <a:t>Text messaging isn't carrier registered.</a:t>
             </a:r>
             <a:endParaRPr lang="en-US" sz="1350" dirty="0"/>
           </a:p>
@@ -15872,7 +15872,7 @@
                 <a:ea typeface="Calibri" pitchFamily="34" charset="-122"/>
                 <a:cs typeface="Calibri" pitchFamily="34" charset="-120"/>
               </a:rPr>
-              <a:t>The Apex behind it is live and verified. The handshake is not.</a:t>
+              <a:t>The Apex behind it is live and verified. The handshake isn't.</a:t>
             </a:r>
             <a:endParaRPr lang="en-US" sz="1150" dirty="0"/>
           </a:p>
@@ -16060,7 +16060,7 @@
                 <a:ea typeface="Calibri" pitchFamily="34" charset="-122"/>
                 <a:cs typeface="Calibri" pitchFamily="34" charset="-120"/>
               </a:rPr>
-              <a:t>Why this has not happened, and why that is over.</a:t>
+              <a:t>Why this hasn't happened, and why that is over.</a:t>
             </a:r>
             <a:endParaRPr lang="en-US" sz="1600" dirty="0"/>
           </a:p>
@@ -16170,7 +16170,7 @@
                 <a:ea typeface="Cambria" pitchFamily="34" charset="-122"/>
                 <a:cs typeface="Cambria" pitchFamily="34" charset="-120"/>
               </a:rPr>
-              <a:t>Why good employers have not done this.</a:t>
+              <a:t>Why good employers haven't done this.</a:t>
             </a:r>
             <a:endParaRPr lang="en-US" sz="3300" dirty="0"/>
           </a:p>
@@ -16273,7 +16273,7 @@
                 <a:ea typeface="Calibri" pitchFamily="34" charset="-122"/>
                 <a:cs typeface="Calibri" pitchFamily="34" charset="-120"/>
               </a:rPr>
-              <a:t>The cost is real and has never been priced, so it has never been funded. You cannot get money for a problem with no line item.</a:t>
+              <a:t>The cost is real and has never been priced, so it has never been funded. You can't get money for a problem with no line item.</a:t>
             </a:r>
             <a:endParaRPr lang="en-US" sz="1150" dirty="0"/>
           </a:p>
@@ -16479,7 +16479,7 @@
                 <a:ea typeface="Calibri" pitchFamily="34" charset="-122"/>
                 <a:cs typeface="Calibri" pitchFamily="34" charset="-120"/>
               </a:rPr>
-              <a:t>Handling a disclosure badly carries legal risk, so doing nothing feels safest. It is not safer. It is only quieter.</a:t>
+              <a:t>Handling a disclosure badly carries legal risk, so doing nothing feels safest. It isn't safer. It is only quieter.</a:t>
             </a:r>
             <a:endParaRPr lang="en-US" sz="1150" dirty="0"/>
           </a:p>
@@ -17259,7 +17259,7 @@
                 <a:ea typeface="Calibri" pitchFamily="34" charset="-122"/>
                 <a:cs typeface="Calibri" pitchFamily="34" charset="-120"/>
               </a:rPr>
-              <a:t>We are not asking for a case study or a logo. Those five things are what actually makes an accommodation arrive, and an organisation unwilling to do them would not have got value from the software either.</a:t>
+              <a:t>We aren't asking for a case study or a logo. Those five things are what actually makes an accommodation arrive, and an organisation unwilling to do them wouldn't have got value from the software either.</a:t>
             </a:r>
             <a:endParaRPr lang="en-US" sz="1350" dirty="0"/>
           </a:p>
@@ -17470,7 +17470,7 @@
                 <a:ea typeface="Calibri" pitchFamily="34" charset="-122"/>
                 <a:cs typeface="Calibri" pitchFamily="34" charset="-120"/>
               </a:rPr>
-              <a:t>For roughly three in ten people at work, that calculation is not occasional. It is a standing condition of the job, and the price of getting it wrong is not an awkward moment. It is being seen as difficult, or fragile, or not worth staffing.</a:t>
+              <a:t>For roughly three in ten people at work, that calculation isn't occasional. It is a standing condition of the job, and the price of getting it wrong isn't an awkward moment. It is being seen as difficult, or fragile, or not worth staffing.</a:t>
             </a:r>
             <a:endParaRPr lang="en-US" sz="1600" dirty="0"/>
           </a:p>
@@ -17721,7 +17721,7 @@
                 <a:ea typeface="Cambria" pitchFamily="34" charset="-122"/>
                 <a:cs typeface="Cambria" pitchFamily="34" charset="-120"/>
               </a:rPr>
-              <a:t>It does not want to understand her. It wants a diagnosis, in writing, for somebody who will still be her manager on Monday.</a:t>
+              <a:t>It doesn't want to understand her. It wants a diagnosis, in writing, for somebody who will still be her manager on Monday.</a:t>
             </a:r>
             <a:endParaRPr lang="en-US" sz="1600" dirty="0"/>
           </a:p>
@@ -18850,7 +18850,7 @@
                 <a:ea typeface="Cambria" pitchFamily="34" charset="-122"/>
                 <a:cs typeface="Cambria" pitchFamily="34" charset="-120"/>
               </a:rPr>
-              <a:t>Do not take any of it on trust.</a:t>
+              <a:t>Don't take any of it on trust.</a:t>
             </a:r>
             <a:endParaRPr lang="en-US" sz="3300" dirty="0"/>
           </a:p>
@@ -18889,7 +18889,7 @@
                 <a:ea typeface="Courier New" pitchFamily="34" charset="-122"/>
                 <a:cs typeface="Courier New" pitchFamily="34" charset="-120"/>
               </a:rPr>
-              <a:t>494</a:t>
+              <a:t>508</a:t>
             </a:r>
             <a:endParaRPr lang="en-US" sz="1600" dirty="0"/>
           </a:p>
@@ -20149,7 +20149,7 @@
                 <a:ea typeface="Courier New" pitchFamily="34" charset="-122"/>
                 <a:cs typeface="Courier New" pitchFamily="34" charset="-120"/>
               </a:rPr>
-              <a:t>python3 tests/invariants.py          494 checks</a:t>
+              <a:t>python3 tests/invariants.py          508 checks</a:t>
             </a:r>
             <a:endParaRPr lang="en-US" sz="1050" dirty="0"/>
           </a:p>
@@ -20166,7 +20166,7 @@
                 <a:ea typeface="Courier New" pitchFamily="34" charset="-122"/>
                 <a:cs typeface="Courier New" pitchFamily="34" charset="-120"/>
               </a:rPr>
-              <a:t>sf apex run test -l RunLocalTests     124 tests</a:t>
+              <a:t>sf apex run test -l RunLocalTests     137 tests</a:t>
             </a:r>
             <a:endParaRPr lang="en-US" sz="1050" dirty="0"/>
           </a:p>
@@ -20332,7 +20332,7 @@
                 <a:ea typeface="Cambria" pitchFamily="34" charset="-122"/>
                 <a:cs typeface="Cambria" pitchFamily="34" charset="-120"/>
               </a:rPr>
-              <a:t>One roadblock is not one bad day.</a:t>
+              <a:t>One roadblock isn't one bad day.</a:t>
             </a:r>
             <a:endParaRPr lang="en-US" sz="3300" dirty="0"/>
           </a:p>
@@ -20608,7 +20608,7 @@
                 <a:ea typeface="Cambria" pitchFamily="34" charset="-122"/>
                 <a:cs typeface="Cambria" pitchFamily="34" charset="-120"/>
               </a:rPr>
-              <a:t>It is almost always man-made</a:t>
+              <a:t>It's almost always man-made</a:t>
             </a:r>
             <a:endParaRPr lang="en-US" sz="1500" dirty="0"/>
           </a:p>
@@ -20647,7 +20647,7 @@
                 <a:ea typeface="Calibri" pitchFamily="34" charset="-122"/>
                 <a:cs typeface="Calibri" pitchFamily="34" charset="-120"/>
               </a:rPr>
-              <a:t>Not the condition. The form, the login, the policy nobody can find, the manager who needs proof.</a:t>
+              <a:t>Not the condition itself, but the form, the login, the policy nobody can find, and the manager who needs proof.</a:t>
             </a:r>
             <a:endParaRPr lang="en-US" sz="1200" dirty="0"/>
           </a:p>
@@ -20791,7 +20791,7 @@
                 <a:ea typeface="Cambria" pitchFamily="34" charset="-122"/>
                 <a:cs typeface="Cambria" pitchFamily="34" charset="-120"/>
               </a:rPr>
-              <a:t>We say everyone is equal. In a market, everyone is a transaction. It should not take a dataset to argue that a person is worth an hour of flexibility. Here is the dataset anyway.</a:t>
+              <a:t>We say everyone is equal. In a market, everyone is a transaction. It shouldn't take a dataset to argue that a person is worth an hour of flexibility. Here is the dataset anyway.</a:t>
             </a:r>
             <a:endParaRPr lang="en-US" sz="1600" dirty="0"/>
           </a:p>
@@ -21252,7 +21252,7 @@
                 <a:ea typeface="Calibri" pitchFamily="34" charset="-122"/>
                 <a:cs typeface="Calibri" pitchFamily="34" charset="-120"/>
               </a:rPr>
-              <a:t>Reference architecture, the channel layer, the grounding path, and the three rules the system will not break</a:t>
+              <a:t>Reference architecture, the channel layer, the grounding path, and the three rules the system won't break</a:t>
             </a:r>
             <a:endParaRPr lang="en-US" sz="1200" dirty="0"/>
           </a:p>
@@ -21486,7 +21486,7 @@
                 <a:ea typeface="Calibri" pitchFamily="34" charset="-122"/>
                 <a:cs typeface="Calibri" pitchFamily="34" charset="-120"/>
               </a:rPr>
-              <a:t>Why good employers have not done this, and what we will give the first ten who will</a:t>
+              <a:t>Why good employers haven't done this, and what we will give the first ten who will</a:t>
             </a:r>
             <a:endParaRPr lang="en-US" sz="1200" dirty="0"/>
           </a:p>
@@ -21960,7 +21960,7 @@
                 <a:ea typeface="Cambria" pitchFamily="34" charset="-122"/>
                 <a:cs typeface="Cambria" pitchFamily="34" charset="-120"/>
               </a:rPr>
-              <a:t>Measured again in 2022 and 2025. It has not closed.</a:t>
+              <a:t>Measured again in 2022 and 2025. It hasn't closed.</a:t>
             </a:r>
             <a:endParaRPr lang="en-US" sz="1350" dirty="0"/>
           </a:p>

--- a/submission/Curb-Cut.pptx
+++ b/submission/Curb-Cut.pptx
@@ -10459,7 +10459,7 @@
                 <a:ea typeface="Courier New" pitchFamily="34" charset="-122"/>
                 <a:cs typeface="Courier New" pitchFamily="34" charset="-120"/>
               </a:rPr>
-              <a:t>awaiting carrier</a:t>
+              <a:t>live, via relay</a:t>
             </a:r>
             <a:endParaRPr lang="en-US" sz="850" dirty="0"/>
           </a:p>
@@ -15755,7 +15755,7 @@
                 <a:ea typeface="Cambria" pitchFamily="34" charset="-122"/>
                 <a:cs typeface="Cambria" pitchFamily="34" charset="-120"/>
               </a:rPr>
-              <a:t>Text messaging isn't carrier registered.</a:t>
+              <a:t>Text and voice run through a relay on a laptop.</a:t>
             </a:r>
             <a:endParaRPr lang="en-US" sz="1350" dirty="0"/>
           </a:p>
@@ -15794,7 +15794,7 @@
                 <a:ea typeface="Calibri" pitchFamily="34" charset="-122"/>
                 <a:cs typeface="Calibri" pitchFamily="34" charset="-120"/>
               </a:rPr>
-              <a:t>A2P 10DLC gates SMS from a ten digit number. Voice on the same number needs none and works today.</a:t>
+              <a:t>The number answers through a small relay beside the org. When it's down, the number goes quiet rather than replying wrongly. Hosting it is the first real deployment task.</a:t>
             </a:r>
             <a:endParaRPr lang="en-US" sz="1150" dirty="0"/>
           </a:p>

--- a/submission/Curb-Cut.pptx
+++ b/submission/Curb-Cut.pptx
@@ -5918,7 +5918,7 @@
                 <a:ea typeface="Cambria" pitchFamily="34" charset="-122"/>
                 <a:cs typeface="Cambria" pitchFamily="34" charset="-120"/>
               </a:rPr>
-              <a:t>The user buys nothing. That is deliberate.</a:t>
+              <a:t>The user buys nothing. That's deliberate.</a:t>
             </a:r>
             <a:endParaRPr lang="en-US" sz="3300" dirty="0"/>
           </a:p>
@@ -6681,7 +6681,7 @@
                 <a:ea typeface="Cambria" pitchFamily="34" charset="-122"/>
                 <a:cs typeface="Cambria" pitchFamily="34" charset="-120"/>
               </a:rPr>
-              <a:t>The gap isn't a spending gap. It is a process gap, which is cheaper to close and harder to sell, because no budget line says "the asking was too hard".</a:t>
+              <a:t>The gap isn't a spending gap. It's a process gap, which is cheaper to close and harder to sell, because no budget line says "the asking was too hard".</a:t>
             </a:r>
             <a:endParaRPr lang="en-US" sz="1600" dirty="0"/>
           </a:p>
@@ -7825,7 +7825,7 @@
                 <a:ea typeface="Cambria" pitchFamily="34" charset="-122"/>
                 <a:cs typeface="Cambria" pitchFamily="34" charset="-120"/>
               </a:rPr>
-              <a:t>It can say it is failing somebody. Not what they said.</a:t>
+              <a:t>It can say it's failing somebody, without ever knowing what they said.</a:t>
             </a:r>
             <a:endParaRPr lang="en-US" sz="3300" dirty="0"/>
           </a:p>
@@ -12307,7 +12307,7 @@
                 <a:ea typeface="Cambria" pitchFamily="34" charset="-122"/>
                 <a:cs typeface="Cambria" pitchFamily="34" charset="-120"/>
               </a:rPr>
-              <a:t>Not encrypted. Not permission-restricted. Absent.</a:t>
+              <a:t>It isn't encrypted or locked behind a permission. It simply isn't there.</a:t>
             </a:r>
             <a:endParaRPr lang="en-US" sz="1650" dirty="0"/>
           </a:p>
@@ -12988,7 +12988,7 @@
                 <a:ea typeface="Courier New" pitchFamily="34" charset="-122"/>
                 <a:cs typeface="Courier New" pitchFamily="34" charset="-120"/>
               </a:rPr>
-              <a:t>That is the whole problem. Everyone in this room has felt the small version of it.</a:t>
+              <a:t>That's the whole problem. Everyone in this room has felt the small version of it.</a:t>
             </a:r>
             <a:endParaRPr lang="en-US" sz="1250" dirty="0"/>
           </a:p>
@@ -15333,7 +15333,7 @@
                 <a:ea typeface="Cambria" pitchFamily="34" charset="-122"/>
                 <a:cs typeface="Cambria" pitchFamily="34" charset="-120"/>
               </a:rPr>
-              <a:t>Where it is deterministic, it is 100%</a:t>
+              <a:t>Where it's deterministic, it's 100%</a:t>
             </a:r>
             <a:endParaRPr lang="en-US" sz="1450" dirty="0"/>
           </a:p>
@@ -16479,7 +16479,7 @@
                 <a:ea typeface="Calibri" pitchFamily="34" charset="-122"/>
                 <a:cs typeface="Calibri" pitchFamily="34" charset="-120"/>
               </a:rPr>
-              <a:t>Handling a disclosure badly carries legal risk, so doing nothing feels safest. It isn't safer. It is only quieter.</a:t>
+              <a:t>Handling a disclosure badly carries legal risk, so doing nothing feels safest. It isn't safer, only quieter.</a:t>
             </a:r>
             <a:endParaRPr lang="en-US" sz="1150" dirty="0"/>
           </a:p>
@@ -16724,7 +16724,7 @@
                 <a:ea typeface="Cambria" pitchFamily="34" charset="-122"/>
                 <a:cs typeface="Cambria" pitchFamily="34" charset="-120"/>
               </a:rPr>
-              <a:t>None of this is malice. All of it was a reason. From today none of it is an excuse, because the thing exists, it is open, and it costs nothing to try.</a:t>
+              <a:t>None of this was malice, and each one was a reason. From today, none of them is an excuse, because the thing exists, it's open, and it costs nothing to try.</a:t>
             </a:r>
             <a:endParaRPr lang="en-US" sz="1600" dirty="0"/>
           </a:p>
@@ -17470,7 +17470,7 @@
                 <a:ea typeface="Calibri" pitchFamily="34" charset="-122"/>
                 <a:cs typeface="Calibri" pitchFamily="34" charset="-120"/>
               </a:rPr>
-              <a:t>For roughly three in ten people at work, that calculation isn't occasional. It is a standing condition of the job, and the price of getting it wrong isn't an awkward moment. It is being seen as difficult, or fragile, or not worth staffing.</a:t>
+              <a:t>For roughly three in ten people at work, that calculation isn't occasional. It's a standing condition of the job, and the price of getting it wrong isn't an awkward moment. It's being seen as difficult, or fragile, or not worth staffing.</a:t>
             </a:r>
             <a:endParaRPr lang="en-US" sz="1600" dirty="0"/>
           </a:p>
@@ -17490,7 +17490,7 @@
                 <a:ea typeface="Calibri" pitchFamily="34" charset="-122"/>
                 <a:cs typeface="Calibri" pitchFamily="34" charset="-120"/>
               </a:rPr>
-              <a:t>And the way through is almost never a conversation. It is this.</a:t>
+              <a:t>And the way through is almost never a conversation. It's this.</a:t>
             </a:r>
             <a:endParaRPr lang="en-US" sz="1600" dirty="0"/>
           </a:p>

--- a/submission/Curb-Cut.pptx
+++ b/submission/Curb-Cut.pptx
@@ -15833,7 +15833,7 @@
                 <a:ea typeface="Cambria" pitchFamily="34" charset="-122"/>
                 <a:cs typeface="Cambria" pitchFamily="34" charset="-120"/>
               </a:rPr>
-              <a:t>The Slack app has never met a real workspace.</a:t>
+              <a:t>Slack, text and voice all live on one laptop.</a:t>
             </a:r>
             <a:endParaRPr lang="en-US" sz="1350" dirty="0"/>
           </a:p>
@@ -15872,7 +15872,7 @@
                 <a:ea typeface="Calibri" pitchFamily="34" charset="-122"/>
                 <a:cs typeface="Calibri" pitchFamily="34" charset="-120"/>
               </a:rPr>
-              <a:t>The Apex behind it is live and verified. The handshake isn't.</a:t>
+              <a:t>The Slack app is installed in a real workspace and answers over Socket Mode, but it runs beside the relay. When the laptop sleeps, three channels go quiet at once.</a:t>
             </a:r>
             <a:endParaRPr lang="en-US" sz="1150" dirty="0"/>
           </a:p>

--- a/submission/Curb-Cut.pptx
+++ b/submission/Curb-Cut.pptx
@@ -5918,7 +5918,7 @@
                 <a:ea typeface="Cambria" pitchFamily="34" charset="-122"/>
                 <a:cs typeface="Cambria" pitchFamily="34" charset="-120"/>
               </a:rPr>
-              <a:t>The user buys nothing. That's deliberate.</a:t>
+              <a:t>The person asking pays nothing. The employer or a deployer group runs it.</a:t>
             </a:r>
             <a:endParaRPr lang="en-US" sz="3300" dirty="0"/>
           </a:p>
@@ -6681,7 +6681,7 @@
                 <a:ea typeface="Cambria" pitchFamily="34" charset="-122"/>
                 <a:cs typeface="Cambria" pitchFamily="34" charset="-120"/>
               </a:rPr>
-              <a:t>The gap isn't a spending gap. It's a process gap, which is cheaper to close and harder to sell, because no budget line says "the asking was too hard".</a:t>
+              <a:t>Employers aren't short of money for this. They're short of a process, and no budget line says "the asking was too hard".</a:t>
             </a:r>
             <a:endParaRPr lang="en-US" sz="1600" dirty="0"/>
           </a:p>
@@ -6940,7 +6940,7 @@
                 <a:ea typeface="Cambria" pitchFamily="34" charset="-122"/>
                 <a:cs typeface="Cambria" pitchFamily="34" charset="-120"/>
               </a:rPr>
-              <a:t>Five layers. One of them is deliberately empty.</a:t>
+              <a:t>Five layers. The data layer has no diagnosis field.</a:t>
             </a:r>
             <a:endParaRPr lang="en-US" sz="3300" dirty="0"/>
           </a:p>
@@ -8289,7 +8289,7 @@
                 <a:ea typeface="Cambria" pitchFamily="34" charset="-122"/>
                 <a:cs typeface="Cambria" pitchFamily="34" charset="-120"/>
               </a:rPr>
-              <a:t>Telemetry that would let an employer read a conversation is surveillance with a dashboard. This one measures the system and protects the person.</a:t>
+              <a:t>The ledger records delivery, never the message, so an employer can't use it to read a conversation.</a:t>
             </a:r>
             <a:endParaRPr lang="en-US" sz="1600" dirty="0"/>
           </a:p>
@@ -9408,7 +9408,7 @@
                 <a:ea typeface="Cambria" pitchFamily="34" charset="-122"/>
                 <a:cs typeface="Cambria" pitchFamily="34" charset="-120"/>
               </a:rPr>
-              <a:t>Steps one to four contain no inference at all. The cheapest system is the one that doesn't ask a model a question it already knows the answer to.</a:t>
+              <a:t>Steps one to four are Apex. The model only phrases the reply.</a:t>
             </a:r>
             <a:endParaRPr lang="en-US" sz="1600" dirty="0"/>
           </a:p>
@@ -12158,7 +12158,7 @@
                 <a:ea typeface="Cambria" pitchFamily="34" charset="-122"/>
                 <a:cs typeface="Cambria" pitchFamily="34" charset="-120"/>
               </a:rPr>
-              <a:t>The alphabet leaves out O 0 I 1 S 5, the characters people confuse on a cracked screen or read aloud. An accessibility decision inside a cryptographic one.</a:t>
+              <a:t>The code alphabet leaves out O 0 I 1 S 5, so it survives a cracked screen or being read aloud.</a:t>
             </a:r>
             <a:endParaRPr lang="en-US" sz="1600" dirty="0"/>
           </a:p>
@@ -13861,7 +13861,7 @@
                 <a:ea typeface="Cambria" pitchFamily="34" charset="-122"/>
                 <a:cs typeface="Cambria" pitchFamily="34" charset="-120"/>
               </a:rPr>
-              <a:t>Each one now has a check that fails the build if it ever comes back.</a:t>
+              <a:t>Five checks now fail the build if any of these comes back: advertised-keyword-is-routed, kindness, privacy-page-does-not-overclaim, redaction-spares-identity-words, adversarial-silence-is-not-success.</a:t>
             </a:r>
             <a:endParaRPr lang="en-US" sz="1600" dirty="0"/>
           </a:p>
@@ -14323,7 +14323,7 @@
                 <a:ea typeface="Cambria" pitchFamily="34" charset="-122"/>
                 <a:cs typeface="Cambria" pitchFamily="34" charset="-120"/>
               </a:rPr>
-              <a:t>An incomplete isn't a pass. Reporting it as one would have been the easiest lie in the submission.</a:t>
+              <a:t>axe returned incomplete on colour contrast because jsdom has no canvas. We measured contrast ourselves instead: 28 pairs, all passing.</a:t>
             </a:r>
             <a:endParaRPr lang="en-US" sz="1600" dirty="0"/>
           </a:p>
@@ -15014,7 +15014,7 @@
                 <a:ea typeface="Cambria" pitchFamily="34" charset="-122"/>
                 <a:cs typeface="Cambria" pitchFamily="34" charset="-120"/>
               </a:rPr>
-              <a:t>A check that lies to you is worse than no check. So --selftest breaks four of them on purpose and asserts each one goes red.</a:t>
+              <a:t>--selftest breaks five checks on purpose and asserts each one goes red.</a:t>
             </a:r>
             <a:endParaRPr lang="en-US" sz="1600" dirty="0"/>
           </a:p>
@@ -15450,7 +15450,7 @@
                 <a:ea typeface="Courier New" pitchFamily="34" charset="-122"/>
                 <a:cs typeface="Courier New" pitchFamily="34" charset="-120"/>
               </a:rPr>
-              <a:t>137 Apex   |   508 invariants   |   333 accessibility   |   131 Sa11y   |   28 contrast   |   16 reading level   |   all passing, every build</a:t>
+              <a:t>137 Apex   |   509 invariants   |   331 accessibility   |   131 Sa11y   |   28 contrast   |   16 reading level   |   all passing, every build</a:t>
             </a:r>
             <a:endParaRPr lang="en-US" sz="1200" dirty="0"/>
           </a:p>
@@ -15911,7 +15911,7 @@
                 <a:ea typeface="Cambria" pitchFamily="34" charset="-122"/>
                 <a:cs typeface="Cambria" pitchFamily="34" charset="-120"/>
               </a:rPr>
-              <a:t>A system that claims a perfect score against its own adversarial suite is telling you about its suite, not its agent.</a:t>
+              <a:t>We score 21 of 23. The two failures are named above, with the transcripts.</a:t>
             </a:r>
             <a:endParaRPr lang="en-US" sz="1600" dirty="0"/>
           </a:p>
@@ -17027,7 +17027,7 @@
                 <a:ea typeface="Calibri" pitchFamily="34" charset="-122"/>
                 <a:cs typeface="Calibri" pitchFamily="34" charset="-120"/>
               </a:rPr>
-              <a:t>No licence, no seat count, no lock-in</a:t>
+              <a:t>MIT licence, no seat count, no lock-in</a:t>
             </a:r>
             <a:endParaRPr lang="en-US" sz="1250" dirty="0"/>
           </a:p>
@@ -19031,7 +19031,7 @@
                 <a:ea typeface="Courier New" pitchFamily="34" charset="-122"/>
                 <a:cs typeface="Courier New" pitchFamily="34" charset="-120"/>
               </a:rPr>
-              <a:t>124</a:t>
+              <a:t>137</a:t>
             </a:r>
             <a:endParaRPr lang="en-US" sz="1600" dirty="0"/>
           </a:p>
@@ -19173,7 +19173,7 @@
                 <a:ea typeface="Courier New" pitchFamily="34" charset="-122"/>
                 <a:cs typeface="Courier New" pitchFamily="34" charset="-120"/>
               </a:rPr>
-              <a:t>333</a:t>
+              <a:t>331</a:t>
             </a:r>
             <a:endParaRPr lang="en-US" sz="1600" dirty="0"/>
           </a:p>
@@ -19883,7 +19883,7 @@
                 <a:ea typeface="Cambria" pitchFamily="34" charset="-122"/>
                 <a:cs typeface="Cambria" pitchFamily="34" charset="-120"/>
               </a:rPr>
-              <a:t>Nothing in this deck is asserted from memory. Every figure was read from the deployed org, or from the run that produced it.</a:t>
+              <a:t>Every figure in this deck was read from the deployed org or from the run that produced it. The commands are on this slide.</a:t>
             </a:r>
             <a:endParaRPr lang="en-US" sz="1600" dirty="0"/>
           </a:p>
@@ -20183,7 +20183,7 @@
                 <a:ea typeface="Courier New" pitchFamily="34" charset="-122"/>
                 <a:cs typeface="Courier New" pitchFamily="34" charset="-120"/>
               </a:rPr>
-              <a:t>python3 tests/a11y_audit.py          333 checks, against the live pages</a:t>
+              <a:t>python3 tests/a11y_audit.py          331 checks, against the live pages</a:t>
             </a:r>
             <a:endParaRPr lang="en-US" sz="1050" dirty="0"/>
           </a:p>
@@ -20791,7 +20791,7 @@
                 <a:ea typeface="Cambria" pitchFamily="34" charset="-122"/>
                 <a:cs typeface="Cambria" pitchFamily="34" charset="-120"/>
               </a:rPr>
-              <a:t>We say everyone is equal. In a market, everyone is a transaction. It shouldn't take a dataset to argue that a person is worth an hour of flexibility. Here is the dataset anyway.</a:t>
+              <a:t>It shouldn't take a dataset to argue that a person is worth an hour of flexibility. Here is the dataset anyway.</a:t>
             </a:r>
             <a:endParaRPr lang="en-US" sz="1600" dirty="0"/>
           </a:p>

--- a/submission/Curb-Cut.pptx
+++ b/submission/Curb-Cut.pptx
@@ -15450,7 +15450,7 @@
                 <a:ea typeface="Courier New" pitchFamily="34" charset="-122"/>
                 <a:cs typeface="Courier New" pitchFamily="34" charset="-120"/>
               </a:rPr>
-              <a:t>137 Apex   |   509 invariants   |   331 accessibility   |   131 Sa11y   |   28 contrast   |   16 reading level   |   all passing, every build</a:t>
+              <a:t>137 Apex   |   510 invariants   |   331 accessibility   |   131 Sa11y   |   28 contrast   |   16 reading level   |   all passing, every build</a:t>
             </a:r>
             <a:endParaRPr lang="en-US" sz="1200" dirty="0"/>
           </a:p>

--- a/submission/Curb-Cut.pptx
+++ b/submission/Curb-Cut.pptx
@@ -4049,7 +4049,7 @@
                 <a:ea typeface="Cambria" pitchFamily="34" charset="-122"/>
                 <a:cs typeface="Cambria" pitchFamily="34" charset="-120"/>
               </a:rPr>
-              <a:t>1.3bn</a:t>
+              <a:t>1 in 4</a:t>
             </a:r>
             <a:endParaRPr lang="en-US" sz="3000" dirty="0"/>
           </a:p>
@@ -4088,7 +4088,7 @@
                 <a:ea typeface="Calibri" pitchFamily="34" charset="-122"/>
                 <a:cs typeface="Calibri" pitchFamily="34" charset="-120"/>
               </a:rPr>
-              <a:t>16% of the world</a:t>
+              <a:t>US adults</a:t>
             </a:r>
             <a:endParaRPr lang="en-US" sz="1250" dirty="0"/>
           </a:p>
@@ -4127,7 +4127,7 @@
                 <a:ea typeface="Calibri" pitchFamily="34" charset="-122"/>
                 <a:cs typeface="Calibri" pitchFamily="34" charset="-120"/>
               </a:rPr>
-              <a:t>significant disability</a:t>
+              <a:t>CDC definition</a:t>
             </a:r>
             <a:endParaRPr lang="en-US" sz="1100" dirty="0"/>
           </a:p>
@@ -4166,7 +4166,7 @@
                 <a:ea typeface="Courier New" pitchFamily="34" charset="-122"/>
                 <a:cs typeface="Courier New" pitchFamily="34" charset="-120"/>
               </a:rPr>
-              <a:t>WHO, 2022</a:t>
+              <a:t>CDC; Statistics Canada 27%, 2022</a:t>
             </a:r>
             <a:endParaRPr lang="en-US" sz="950" dirty="0"/>
           </a:p>
@@ -4232,7 +4232,7 @@
                 <a:ea typeface="Cambria" pitchFamily="34" charset="-122"/>
                 <a:cs typeface="Cambria" pitchFamily="34" charset="-120"/>
               </a:rPr>
-              <a:t>27%</a:t>
+              <a:t>22.8%</a:t>
             </a:r>
             <a:endParaRPr lang="en-US" sz="3000" dirty="0"/>
           </a:p>
@@ -4271,7 +4271,7 @@
                 <a:ea typeface="Calibri" pitchFamily="34" charset="-122"/>
                 <a:cs typeface="Calibri" pitchFamily="34" charset="-120"/>
               </a:rPr>
-              <a:t>of Canadians 15+</a:t>
+              <a:t>employed, against 65.2%</a:t>
             </a:r>
             <a:endParaRPr lang="en-US" sz="1250" dirty="0"/>
           </a:p>
@@ -4310,7 +4310,7 @@
                 <a:ea typeface="Calibri" pitchFamily="34" charset="-122"/>
                 <a:cs typeface="Calibri" pitchFamily="34" charset="-120"/>
               </a:rPr>
-              <a:t>one or more disabilities</a:t>
+              <a:t>all people with a disability, 2025</a:t>
             </a:r>
             <a:endParaRPr lang="en-US" sz="1100" dirty="0"/>
           </a:p>
@@ -4349,7 +4349,7 @@
                 <a:ea typeface="Courier New" pitchFamily="34" charset="-122"/>
                 <a:cs typeface="Courier New" pitchFamily="34" charset="-120"/>
               </a:rPr>
-              <a:t>Statistics Canada, 2022</a:t>
+              <a:t>US BLS, released March 2026</a:t>
             </a:r>
             <a:endParaRPr lang="en-US" sz="950" dirty="0"/>
           </a:p>
@@ -4415,7 +4415,7 @@
                 <a:ea typeface="Cambria" pitchFamily="34" charset="-122"/>
                 <a:cs typeface="Cambria" pitchFamily="34" charset="-120"/>
               </a:rPr>
-              <a:t>22.8%</a:t>
+              <a:t>30%</a:t>
             </a:r>
             <a:endParaRPr lang="en-US" sz="3000" dirty="0"/>
           </a:p>
@@ -4454,7 +4454,7 @@
                 <a:ea typeface="Calibri" pitchFamily="34" charset="-122"/>
                 <a:cs typeface="Calibri" pitchFamily="34" charset="-120"/>
               </a:rPr>
-              <a:t>employed, against 65.2%</a:t>
+              <a:t>usually work part time, against 17%</a:t>
             </a:r>
             <a:endParaRPr lang="en-US" sz="1250" dirty="0"/>
           </a:p>
@@ -4493,7 +4493,7 @@
                 <a:ea typeface="Calibri" pitchFamily="34" charset="-122"/>
                 <a:cs typeface="Calibri" pitchFamily="34" charset="-120"/>
               </a:rPr>
-              <a:t>all people with a disability</a:t>
+              <a:t>employed people with a disability, 2025</a:t>
             </a:r>
             <a:endParaRPr lang="en-US" sz="1100" dirty="0"/>
           </a:p>
@@ -4532,7 +4532,7 @@
                 <a:ea typeface="Courier New" pitchFamily="34" charset="-122"/>
                 <a:cs typeface="Courier New" pitchFamily="34" charset="-120"/>
               </a:rPr>
-              <a:t>US BLS, 2025</a:t>
+              <a:t>US BLS, released March 2026</a:t>
             </a:r>
             <a:endParaRPr lang="en-US" sz="950" dirty="0"/>
           </a:p>
@@ -4598,7 +4598,7 @@
                 <a:ea typeface="Cambria" pitchFamily="34" charset="-122"/>
                 <a:cs typeface="Cambria" pitchFamily="34" charset="-120"/>
               </a:rPr>
-              <a:t>30%</a:t>
+              <a:t>3.5%</a:t>
             </a:r>
             <a:endParaRPr lang="en-US" sz="3000" dirty="0"/>
           </a:p>
@@ -4637,7 +4637,7 @@
                 <a:ea typeface="Calibri" pitchFamily="34" charset="-122"/>
                 <a:cs typeface="Calibri" pitchFamily="34" charset="-120"/>
               </a:rPr>
-              <a:t>of US white-collar</a:t>
+              <a:t>told their employer</a:t>
             </a:r>
             <a:endParaRPr lang="en-US" sz="1250" dirty="0"/>
           </a:p>
@@ -4676,7 +4676,7 @@
                 <a:ea typeface="Calibri" pitchFamily="34" charset="-122"/>
                 <a:cs typeface="Calibri" pitchFamily="34" charset="-120"/>
               </a:rPr>
-              <a:t>broad federal definition</a:t>
+              <a:t>median across 655 large employers, 2025</a:t>
             </a:r>
             <a:endParaRPr lang="en-US" sz="1100" dirty="0"/>
           </a:p>
@@ -4715,7 +4715,7 @@
                 <a:ea typeface="Courier New" pitchFamily="34" charset="-122"/>
                 <a:cs typeface="Courier New" pitchFamily="34" charset="-120"/>
               </a:rPr>
-              <a:t>Coqual</a:t>
+              <a:t>Disability:IN 2025 index</a:t>
             </a:r>
             <a:endParaRPr lang="en-US" sz="950" dirty="0"/>
           </a:p>
@@ -4754,7 +4754,7 @@
                 <a:ea typeface="Calibri" pitchFamily="34" charset="-122"/>
                 <a:cs typeface="Calibri" pitchFamily="34" charset="-120"/>
               </a:rPr>
-              <a:t>They disagree because they count different things. WHO measures significant disability. The national definitions are broader.</a:t>
+              <a:t>The people this affects are more likely to be paid by the hour, to work part time, and to be in service, production and transport jobs. The programmes exist at 98% of large employers (2026 index); the telling has not moved.</a:t>
             </a:r>
             <a:endParaRPr lang="en-US" sz="1400" dirty="0"/>
           </a:p>
@@ -4832,7 +4832,7 @@
                 <a:ea typeface="Courier New" pitchFamily="34" charset="-122"/>
                 <a:cs typeface="Courier New" pitchFamily="34" charset="-120"/>
               </a:rPr>
-              <a:t>who.int  |  statcan.gc.ca Canadian Survey on Disability 2022  |  bls.gov Current Population Survey, about 60,000 households monthly  |  coqual.org</a:t>
+              <a:t>cdc.gov  |  bls.gov People with a Disability 2025, released 3 March 2026  |  disabilityin.org 2025 and 2026 Disability Index  |  statcan.gc.ca  |  coqual.org</a:t>
             </a:r>
             <a:endParaRPr lang="en-US" sz="850" dirty="0"/>
           </a:p>
@@ -15450,7 +15450,7 @@
                 <a:ea typeface="Courier New" pitchFamily="34" charset="-122"/>
                 <a:cs typeface="Courier New" pitchFamily="34" charset="-120"/>
               </a:rPr>
-              <a:t>137 Apex   |   510 invariants   |   331 accessibility   |   131 Sa11y   |   28 contrast   |   16 reading level   |   all passing, every build</a:t>
+              <a:t>137 Apex   |   512 invariants   |   331 accessibility   |   131 Sa11y   |   28 contrast   |   16 reading level   |   all passing, every build</a:t>
             </a:r>
             <a:endParaRPr lang="en-US" sz="1200" dirty="0"/>
           </a:p>
@@ -16834,7 +16834,7 @@
                 <a:ea typeface="Cambria" pitchFamily="34" charset="-122"/>
                 <a:cs typeface="Cambria" pitchFamily="34" charset="-120"/>
               </a:rPr>
-              <a:t>Free for the first ten. Here is the price.</a:t>
+              <a:t>Open to any organisation. Here is what it needs.</a:t>
             </a:r>
             <a:endParaRPr lang="en-US" sz="3300" dirty="0"/>
           </a:p>
@@ -17093,7 +17093,7 @@
                 <a:ea typeface="Cambria" pitchFamily="34" charset="-122"/>
                 <a:cs typeface="Cambria" pitchFamily="34" charset="-120"/>
               </a:rPr>
-              <a:t>What we ask instead of money</a:t>
+              <a:t>What it needs to work</a:t>
             </a:r>
             <a:endParaRPr lang="en-US" sz="1500" dirty="0"/>
           </a:p>
@@ -17298,7 +17298,7 @@
                 <a:ea typeface="Cambria" pitchFamily="34" charset="-122"/>
                 <a:cs typeface="Cambria" pitchFamily="34" charset="-120"/>
               </a:rPr>
-              <a:t>Sixty-one in a hundred cost nothing. The first ten will find that out on their own data, in public, and then nobody gets to say it was the money.</a:t>
+              <a:t>Sixty-one in a hundred cost nothing. An organisation that runs this will find that out on its own data, and then nobody gets to say it was the money.</a:t>
             </a:r>
             <a:endParaRPr lang="en-US" sz="1600" dirty="0"/>
           </a:p>
@@ -18353,7 +18353,7 @@
                 <a:ea typeface="Calibri" pitchFamily="34" charset="-122"/>
                 <a:cs typeface="Calibri" pitchFamily="34" charset="-120"/>
               </a:rPr>
-              <a:t>22.8% employed, against 65.2%</a:t>
+              <a:t>22.8% employed, 30% part time</a:t>
             </a:r>
             <a:endParaRPr lang="en-US" sz="1200" dirty="0"/>
           </a:p>
@@ -18392,7 +18392,7 @@
                 <a:ea typeface="Calibri" pitchFamily="34" charset="-122"/>
                 <a:cs typeface="Calibri" pitchFamily="34" charset="-120"/>
               </a:rPr>
-              <a:t>US Bureau of Labor Statistics, 2025</a:t>
+              <a:t>US Bureau of Labor Statistics, 2025 data, released March 2026</a:t>
             </a:r>
             <a:endParaRPr lang="en-US" sz="1150" dirty="0"/>
           </a:p>
@@ -18456,7 +18456,7 @@
                 <a:ea typeface="Calibri" pitchFamily="34" charset="-122"/>
                 <a:cs typeface="Calibri" pitchFamily="34" charset="-120"/>
               </a:rPr>
-              <a:t>30% have one, 3.2% tell</a:t>
+              <a:t>3.5% told their employer, 2025</a:t>
             </a:r>
             <a:endParaRPr lang="en-US" sz="1200" dirty="0"/>
           </a:p>
@@ -18495,7 +18495,7 @@
                 <a:ea typeface="Calibri" pitchFamily="34" charset="-122"/>
                 <a:cs typeface="Calibri" pitchFamily="34" charset="-120"/>
               </a:rPr>
-              <a:t>Coqual, US college-educated white-collar workers</a:t>
+              <a:t>Disability:IN 2025 index, 655 employer submissions; Coqual found 3.2% among white-collar workers</a:t>
             </a:r>
             <a:endParaRPr lang="en-US" sz="1150" dirty="0"/>
           </a:p>
@@ -18559,7 +18559,7 @@
                 <a:ea typeface="Calibri" pitchFamily="34" charset="-122"/>
                 <a:cs typeface="Calibri" pitchFamily="34" charset="-120"/>
               </a:rPr>
-              <a:t>83% of those who told say it helped</a:t>
+              <a:t>98% of employers have the programmes</a:t>
             </a:r>
             <a:endParaRPr lang="en-US" sz="1200" dirty="0"/>
           </a:p>
@@ -18598,7 +18598,7 @@
                 <a:ea typeface="Calibri" pitchFamily="34" charset="-122"/>
                 <a:cs typeface="Calibri" pitchFamily="34" charset="-120"/>
               </a:rPr>
-              <a:t>Coqual, same study</a:t>
+              <a:t>Disability:IN 2026 index, 421 organisations; the disclosure gap persists</a:t>
             </a:r>
             <a:endParaRPr lang="en-US" sz="1150" dirty="0"/>
           </a:p>
@@ -21486,7 +21486,7 @@
                 <a:ea typeface="Calibri" pitchFamily="34" charset="-122"/>
                 <a:cs typeface="Calibri" pitchFamily="34" charset="-120"/>
               </a:rPr>
-              <a:t>Why good employers haven't done this, and what we will give the first ten who will</a:t>
+              <a:t>Why good employers haven't done this, and what it needs from the ones who will</a:t>
             </a:r>
             <a:endParaRPr lang="en-US" sz="1200" dirty="0"/>
           </a:p>

--- a/submission/Curb-Cut.pptx
+++ b/submission/Curb-Cut.pptx
@@ -4754,7 +4754,7 @@
                 <a:ea typeface="Calibri" pitchFamily="34" charset="-122"/>
                 <a:cs typeface="Calibri" pitchFamily="34" charset="-120"/>
               </a:rPr>
-              <a:t>The people this affects are more likely to be paid by the hour, to work part time, and to be in service, production and transport jobs. The programmes exist at 98% of large employers (2026 index); the telling has not moved.</a:t>
+              <a:t>The people this affects are more likely to be paid by the hour, to work part time, and to be in service, production and transport jobs. By 2026, 98% of participating employers report flexible or remote accommodations; the latest self-identification rate, 2025, did not rise.</a:t>
             </a:r>
             <a:endParaRPr lang="en-US" sz="1400" dirty="0"/>
           </a:p>
@@ -6021,7 +6021,7 @@
                 <a:ea typeface="Calibri" pitchFamily="34" charset="-122"/>
                 <a:cs typeface="Calibri" pitchFamily="34" charset="-120"/>
               </a:rPr>
-              <a:t>Contractors, temps, gig workers</a:t>
+              <a:t>Hourly, shift and minimum-wage workers</a:t>
             </a:r>
             <a:endParaRPr lang="en-US" sz="1350" dirty="0"/>
           </a:p>
@@ -6060,7 +6060,7 @@
                 <a:ea typeface="Calibri" pitchFamily="34" charset="-122"/>
                 <a:cs typeface="Calibri" pitchFamily="34" charset="-120"/>
               </a:rPr>
-              <a:t>no work login, no HR relationship, still expected to disclose</a:t>
+              <a:t>nearly twice as likely to be part time; no work email, no desk, no HR office on the floor</a:t>
             </a:r>
             <a:endParaRPr lang="en-US" sz="1200" dirty="0"/>
           </a:p>
@@ -6124,7 +6124,7 @@
                 <a:ea typeface="Calibri" pitchFamily="34" charset="-122"/>
                 <a:cs typeface="Calibri" pitchFamily="34" charset="-120"/>
               </a:rPr>
-              <a:t>People with invisible conditions</a:t>
+              <a:t>Contractors, temps, gig workers</a:t>
             </a:r>
             <a:endParaRPr lang="en-US" sz="1350" dirty="0"/>
           </a:p>
@@ -6163,7 +6163,7 @@
                 <a:ea typeface="Calibri" pitchFamily="34" charset="-122"/>
                 <a:cs typeface="Calibri" pitchFamily="34" charset="-120"/>
               </a:rPr>
-              <a:t>62% of disabled employees. Believed less, asked to prove more</a:t>
+              <a:t>no work login, no HR relationship, still expected to disclose</a:t>
             </a:r>
             <a:endParaRPr lang="en-US" sz="1200" dirty="0"/>
           </a:p>
@@ -6227,7 +6227,7 @@
                 <a:ea typeface="Calibri" pitchFamily="34" charset="-122"/>
                 <a:cs typeface="Calibri" pitchFamily="34" charset="-120"/>
               </a:rPr>
-              <a:t>Deaf and hard-of-hearing workers</a:t>
+              <a:t>People with invisible conditions</a:t>
             </a:r>
             <a:endParaRPr lang="en-US" sz="1350" dirty="0"/>
           </a:p>
@@ -6266,7 +6266,7 @@
                 <a:ea typeface="Calibri" pitchFamily="34" charset="-122"/>
                 <a:cs typeface="Calibri" pitchFamily="34" charset="-120"/>
               </a:rPr>
-              <a:t>almost every escalation path ends at "give us a call"</a:t>
+              <a:t>62% of disabled employees. Believed less, asked to prove more</a:t>
             </a:r>
             <a:endParaRPr lang="en-US" sz="1200" dirty="0"/>
           </a:p>
@@ -6330,7 +6330,7 @@
                 <a:ea typeface="Calibri" pitchFamily="34" charset="-122"/>
                 <a:cs typeface="Calibri" pitchFamily="34" charset="-120"/>
               </a:rPr>
-              <a:t>Anyone in their first weeks</a:t>
+              <a:t>Deaf and hard-of-hearing workers</a:t>
             </a:r>
             <a:endParaRPr lang="en-US" sz="1350" dirty="0"/>
           </a:p>
@@ -6369,6 +6369,109 @@
                 <a:ea typeface="Calibri" pitchFamily="34" charset="-122"/>
                 <a:cs typeface="Calibri" pitchFamily="34" charset="-120"/>
               </a:rPr>
+              <a:t>almost every escalation path ends at "give us a call"</a:t>
+            </a:r>
+            <a:endParaRPr lang="en-US" sz="1200" dirty="0"/>
+          </a:p>
+        </p:txBody>
+      </p:sp>
+      <p:sp>
+        <p:nvSpPr>
+          <p:cNvPr id="17" name="Shape 15"/>
+          <p:cNvSpPr/>
+          <p:nvPr/>
+        </p:nvSpPr>
+        <p:spPr>
+          <a:xfrm>
+            <a:off x="777240" y="4608576"/>
+            <a:ext cx="54864" cy="365760"/>
+          </a:xfrm>
+          <a:prstGeom prst="rect">
+            <a:avLst/>
+          </a:prstGeom>
+          <a:solidFill>
+            <a:srgbClr val="C9A227"/>
+          </a:solidFill>
+          <a:ln w="12700">
+            <a:solidFill>
+              <a:srgbClr val="C9A227"/>
+            </a:solidFill>
+            <a:prstDash val="solid"/>
+          </a:ln>
+        </p:spPr>
+      </p:sp>
+      <p:sp>
+        <p:nvSpPr>
+          <p:cNvPr id="18" name="Text 16"/>
+          <p:cNvSpPr txBox="1"/>
+          <p:nvPr/>
+        </p:nvSpPr>
+        <p:spPr>
+          <a:xfrm>
+            <a:off x="1051560" y="4517136"/>
+            <a:ext cx="3931920" cy="365760"/>
+          </a:xfrm>
+          <a:prstGeom prst="rect">
+            <a:avLst/>
+          </a:prstGeom>
+          <a:noFill/>
+          <a:ln/>
+        </p:spPr>
+        <p:txBody>
+          <a:bodyPr wrap="square" lIns="0" tIns="0" rIns="0" bIns="0" rtlCol="0" anchor="ctr"/>
+          <a:lstStyle/>
+          <a:p>
+            <a:pPr indent="0" marL="0">
+              <a:buNone/>
+            </a:pPr>
+            <a:r>
+              <a:rPr lang="en-US" sz="1350" b="1" dirty="0">
+                <a:solidFill>
+                  <a:srgbClr val="14171A"/>
+                </a:solidFill>
+                <a:latin typeface="Calibri" pitchFamily="34" charset="0"/>
+                <a:ea typeface="Calibri" pitchFamily="34" charset="-122"/>
+                <a:cs typeface="Calibri" pitchFamily="34" charset="-120"/>
+              </a:rPr>
+              <a:t>Anyone in their first weeks</a:t>
+            </a:r>
+            <a:endParaRPr lang="en-US" sz="1350" dirty="0"/>
+          </a:p>
+        </p:txBody>
+      </p:sp>
+      <p:sp>
+        <p:nvSpPr>
+          <p:cNvPr id="19" name="Text 17"/>
+          <p:cNvSpPr txBox="1"/>
+          <p:nvPr/>
+        </p:nvSpPr>
+        <p:spPr>
+          <a:xfrm>
+            <a:off x="5212080" y="4544568"/>
+            <a:ext cx="6217920" cy="365760"/>
+          </a:xfrm>
+          <a:prstGeom prst="rect">
+            <a:avLst/>
+          </a:prstGeom>
+          <a:noFill/>
+          <a:ln/>
+        </p:spPr>
+        <p:txBody>
+          <a:bodyPr wrap="square" lIns="0" tIns="0" rIns="0" bIns="0" rtlCol="0" anchor="ctr"/>
+          <a:lstStyle/>
+          <a:p>
+            <a:pPr indent="0" marL="0">
+              <a:buNone/>
+            </a:pPr>
+            <a:r>
+              <a:rPr lang="en-US" sz="1200" dirty="0">
+                <a:solidFill>
+                  <a:srgbClr val="42474C"/>
+                </a:solidFill>
+                <a:latin typeface="Calibri" pitchFamily="34" charset="0"/>
+                <a:ea typeface="Calibri" pitchFamily="34" charset="-122"/>
+                <a:cs typeface="Calibri" pitchFamily="34" charset="-120"/>
+              </a:rPr>
               <a:t>least social capital, highest perceived cost of asking</a:t>
             </a:r>
             <a:endParaRPr lang="en-US" sz="1200" dirty="0"/>
@@ -6377,7 +6480,7 @@
       </p:sp>
       <p:sp>
         <p:nvSpPr>
-          <p:cNvPr id="17" name="Text 15"/>
+          <p:cNvPr id="20" name="Text 18"/>
           <p:cNvSpPr txBox="1"/>
           <p:nvPr/>
         </p:nvSpPr>
@@ -6416,7 +6519,7 @@
       </p:sp>
       <p:sp>
         <p:nvSpPr>
-          <p:cNvPr id="18" name="Text 16"/>
+          <p:cNvPr id="21" name="Text 19"/>
           <p:cNvSpPr txBox="1"/>
           <p:nvPr/>
         </p:nvSpPr>
@@ -6455,7 +6558,7 @@
       </p:sp>
       <p:sp>
         <p:nvSpPr>
-          <p:cNvPr id="19" name="Text 17"/>
+          <p:cNvPr id="22" name="Text 20"/>
           <p:cNvSpPr txBox="1"/>
           <p:nvPr/>
         </p:nvSpPr>
@@ -6494,7 +6597,7 @@
       </p:sp>
       <p:sp>
         <p:nvSpPr>
-          <p:cNvPr id="20" name="Text 18"/>
+          <p:cNvPr id="23" name="Text 21"/>
           <p:cNvSpPr txBox="1"/>
           <p:nvPr/>
         </p:nvSpPr>
@@ -6533,7 +6636,7 @@
       </p:sp>
       <p:sp>
         <p:nvSpPr>
-          <p:cNvPr id="21" name="Text 19"/>
+          <p:cNvPr id="24" name="Text 22"/>
           <p:cNvSpPr txBox="1"/>
           <p:nvPr/>
         </p:nvSpPr>
@@ -6572,7 +6675,7 @@
       </p:sp>
       <p:sp>
         <p:nvSpPr>
-          <p:cNvPr id="22" name="Text 20"/>
+          <p:cNvPr id="25" name="Text 23"/>
           <p:cNvSpPr txBox="1"/>
           <p:nvPr/>
         </p:nvSpPr>
@@ -6611,7 +6714,7 @@
       </p:sp>
       <p:sp>
         <p:nvSpPr>
-          <p:cNvPr id="23" name="Text 21"/>
+          <p:cNvPr id="26" name="Text 24"/>
           <p:cNvSpPr txBox="1"/>
           <p:nvPr/>
         </p:nvSpPr>
@@ -6650,7 +6753,7 @@
       </p:sp>
       <p:sp>
         <p:nvSpPr>
-          <p:cNvPr id="24" name="Text 22"/>
+          <p:cNvPr id="27" name="Text 25"/>
           <p:cNvSpPr txBox="1"/>
           <p:nvPr/>
         </p:nvSpPr>
@@ -16646,7 +16749,7 @@
                 <a:ea typeface="Cambria" pitchFamily="34" charset="-122"/>
                 <a:cs typeface="Cambria" pitchFamily="34" charset="-120"/>
               </a:rPr>
-              <a:t>Every tool assumed disclosure first.</a:t>
+              <a:t>Every tool started from the diagnosis.</a:t>
             </a:r>
             <a:endParaRPr lang="en-US" sz="1300" dirty="0"/>
           </a:p>
@@ -16685,7 +16788,7 @@
                 <a:ea typeface="Calibri" pitchFamily="34" charset="-122"/>
                 <a:cs typeface="Calibri" pitchFamily="34" charset="-120"/>
               </a:rPr>
-              <a:t>HR systems start from a diagnosis field. Building one without it meant building something new, and nobody had.</a:t>
+              <a:t>HR systems have a field for it, and the newer accommodation platforms hold it on the employee's behalf. Building one with no field at all meant building something new.</a:t>
             </a:r>
             <a:endParaRPr lang="en-US" sz="1150" dirty="0"/>
           </a:p>
@@ -17470,7 +17573,7 @@
                 <a:ea typeface="Calibri" pitchFamily="34" charset="-122"/>
                 <a:cs typeface="Calibri" pitchFamily="34" charset="-120"/>
               </a:rPr>
-              <a:t>For roughly three in ten people at work, that calculation isn't occasional. It's a standing condition of the job, and the price of getting it wrong isn't an awkward moment. It's being seen as difficult, or fragile, or not worth staffing.</a:t>
+              <a:t>For about one in four adults, that calculation isn't occasional. It's a standing condition of the job, and the price of getting it wrong isn't an awkward moment. It's being seen as difficult, or fragile, or not worth staffing.</a:t>
             </a:r>
             <a:endParaRPr lang="en-US" sz="1600" dirty="0"/>
           </a:p>
@@ -18559,7 +18662,7 @@
                 <a:ea typeface="Calibri" pitchFamily="34" charset="-122"/>
                 <a:cs typeface="Calibri" pitchFamily="34" charset="-120"/>
               </a:rPr>
-              <a:t>98% of employers have the programmes</a:t>
+              <a:t>98% report flexible or remote accommodations</a:t>
             </a:r>
             <a:endParaRPr lang="en-US" sz="1200" dirty="0"/>
           </a:p>
@@ -18598,7 +18701,7 @@
                 <a:ea typeface="Calibri" pitchFamily="34" charset="-122"/>
                 <a:cs typeface="Calibri" pitchFamily="34" charset="-120"/>
               </a:rPr>
-              <a:t>Disability:IN 2026 index, 421 organisations; the disclosure gap persists</a:t>
+              <a:t>Disability:IN 2026 index, 421 organisations</a:t>
             </a:r>
             <a:endParaRPr lang="en-US" sz="1150" dirty="0"/>
           </a:p>

--- a/submission/Curb-Cut.pptx
+++ b/submission/Curb-Cut.pptx
@@ -4729,24 +4729,24 @@
         </p:nvSpPr>
         <p:spPr>
           <a:xfrm>
-            <a:off x="777240" y="4343400"/>
-            <a:ext cx="10698480" cy="457200"/>
-          </a:xfrm>
-          <a:prstGeom prst="rect">
-            <a:avLst/>
-          </a:prstGeom>
-          <a:noFill/>
-          <a:ln/>
-        </p:spPr>
-        <p:txBody>
-          <a:bodyPr wrap="square" lIns="0" tIns="0" rIns="0" bIns="0" rtlCol="0" anchor="ctr"/>
-          <a:lstStyle/>
-          <a:p>
-            <a:pPr indent="0" marL="0">
-              <a:buNone/>
-            </a:pPr>
-            <a:r>
-              <a:rPr lang="en-US" sz="1400" dirty="0">
+            <a:off x="777240" y="4297680"/>
+            <a:ext cx="10698480" cy="548640"/>
+          </a:xfrm>
+          <a:prstGeom prst="rect">
+            <a:avLst/>
+          </a:prstGeom>
+          <a:noFill/>
+          <a:ln/>
+        </p:spPr>
+        <p:txBody>
+          <a:bodyPr wrap="square" lIns="0" tIns="0" rIns="0" bIns="0" rtlCol="0" anchor="ctr"/>
+          <a:lstStyle/>
+          <a:p>
+            <a:pPr indent="0" marL="0">
+              <a:buNone/>
+            </a:pPr>
+            <a:r>
+              <a:rPr lang="en-US" sz="1250" dirty="0">
                 <a:solidFill>
                   <a:srgbClr val="14171A"/>
                 </a:solidFill>
@@ -4756,7 +4756,7 @@
               </a:rPr>
               <a:t>The people this affects are more likely to be paid by the hour, to work part time, and to be in service, production and transport jobs. By 2026, 98% of participating employers report flexible or remote accommodations; the latest self-identification rate, 2025, did not rise.</a:t>
             </a:r>
-            <a:endParaRPr lang="en-US" sz="1400" dirty="0"/>
+            <a:endParaRPr lang="en-US" sz="1250" dirty="0"/>
           </a:p>
         </p:txBody>
       </p:sp>

--- a/submission/Curb-Cut.pptx
+++ b/submission/Curb-Cut.pptx
@@ -6074,7 +6074,7 @@
         </p:nvSpPr>
         <p:spPr>
           <a:xfrm>
-            <a:off x="777240" y="3017520"/>
+            <a:off x="777240" y="2926080"/>
             <a:ext cx="54864" cy="365760"/>
           </a:xfrm>
           <a:prstGeom prst="rect">
@@ -6099,7 +6099,7 @@
         </p:nvSpPr>
         <p:spPr>
           <a:xfrm>
-            <a:off x="1051560" y="2926080"/>
+            <a:off x="1051560" y="2834640"/>
             <a:ext cx="3931920" cy="365760"/>
           </a:xfrm>
           <a:prstGeom prst="rect">
@@ -6138,7 +6138,7 @@
         </p:nvSpPr>
         <p:spPr>
           <a:xfrm>
-            <a:off x="5212080" y="2953512"/>
+            <a:off x="5212080" y="2862072"/>
             <a:ext cx="6217920" cy="365760"/>
           </a:xfrm>
           <a:prstGeom prst="rect">
@@ -6177,7 +6177,7 @@
         </p:nvSpPr>
         <p:spPr>
           <a:xfrm>
-            <a:off x="777240" y="3547872"/>
+            <a:off x="777240" y="3364992"/>
             <a:ext cx="54864" cy="365760"/>
           </a:xfrm>
           <a:prstGeom prst="rect">
@@ -6202,7 +6202,7 @@
         </p:nvSpPr>
         <p:spPr>
           <a:xfrm>
-            <a:off x="1051560" y="3456432"/>
+            <a:off x="1051560" y="3273552"/>
             <a:ext cx="3931920" cy="365760"/>
           </a:xfrm>
           <a:prstGeom prst="rect">
@@ -6241,7 +6241,7 @@
         </p:nvSpPr>
         <p:spPr>
           <a:xfrm>
-            <a:off x="5212080" y="3483864"/>
+            <a:off x="5212080" y="3300984"/>
             <a:ext cx="6217920" cy="365760"/>
           </a:xfrm>
           <a:prstGeom prst="rect">
@@ -6280,7 +6280,7 @@
         </p:nvSpPr>
         <p:spPr>
           <a:xfrm>
-            <a:off x="777240" y="4078224"/>
+            <a:off x="777240" y="3803904"/>
             <a:ext cx="54864" cy="365760"/>
           </a:xfrm>
           <a:prstGeom prst="rect">
@@ -6305,7 +6305,7 @@
         </p:nvSpPr>
         <p:spPr>
           <a:xfrm>
-            <a:off x="1051560" y="3986784"/>
+            <a:off x="1051560" y="3712464"/>
             <a:ext cx="3931920" cy="365760"/>
           </a:xfrm>
           <a:prstGeom prst="rect">
@@ -6344,7 +6344,7 @@
         </p:nvSpPr>
         <p:spPr>
           <a:xfrm>
-            <a:off x="5212080" y="4014216"/>
+            <a:off x="5212080" y="3739896"/>
             <a:ext cx="6217920" cy="365760"/>
           </a:xfrm>
           <a:prstGeom prst="rect">
@@ -6383,7 +6383,7 @@
         </p:nvSpPr>
         <p:spPr>
           <a:xfrm>
-            <a:off x="777240" y="4608576"/>
+            <a:off x="777240" y="4242816"/>
             <a:ext cx="54864" cy="365760"/>
           </a:xfrm>
           <a:prstGeom prst="rect">
@@ -6408,7 +6408,7 @@
         </p:nvSpPr>
         <p:spPr>
           <a:xfrm>
-            <a:off x="1051560" y="4517136"/>
+            <a:off x="1051560" y="4151376"/>
             <a:ext cx="3931920" cy="365760"/>
           </a:xfrm>
           <a:prstGeom prst="rect">
@@ -6447,7 +6447,7 @@
         </p:nvSpPr>
         <p:spPr>
           <a:xfrm>
-            <a:off x="5212080" y="4544568"/>
+            <a:off x="5212080" y="4178808"/>
             <a:ext cx="6217920" cy="365760"/>
           </a:xfrm>
           <a:prstGeom prst="rect">

--- a/submission/Curb-Cut.pptx
+++ b/submission/Curb-Cut.pptx
@@ -20286,7 +20286,7 @@
                 <a:ea typeface="Courier New" pitchFamily="34" charset="-122"/>
                 <a:cs typeface="Courier New" pitchFamily="34" charset="-120"/>
               </a:rPr>
-              <a:t>python3 tests/a11y_audit.py          331 checks, against the live pages</a:t>
+              <a:t>python3 tests/a11y_audit.py          527 checks, against the live pages</a:t>
             </a:r>
             <a:endParaRPr lang="en-US" sz="1050" dirty="0"/>
           </a:p>

--- a/submission/Curb-Cut.pptx
+++ b/submission/Curb-Cut.pptx
@@ -20269,7 +20269,7 @@
                 <a:ea typeface="Courier New" pitchFamily="34" charset="-122"/>
                 <a:cs typeface="Courier New" pitchFamily="34" charset="-120"/>
               </a:rPr>
-              <a:t>sf apex run test -l RunLocalTests     137 tests</a:t>
+              <a:t>sf apex run test -l RunLocalTests     127 tests</a:t>
             </a:r>
             <a:endParaRPr lang="en-US" sz="1050" dirty="0"/>
           </a:p>

--- a/submission/Curb-Cut.pptx
+++ b/submission/Curb-Cut.pptx
@@ -15553,7 +15553,7 @@
                 <a:ea typeface="Courier New" pitchFamily="34" charset="-122"/>
                 <a:cs typeface="Courier New" pitchFamily="34" charset="-120"/>
               </a:rPr>
-              <a:t>137 Apex   |   512 invariants   |   331 accessibility   |   131 Sa11y   |   28 contrast   |   16 reading level   |   all passing, every build</a:t>
+              <a:t>127 Apex   |   512 invariants   |   530 accessibility   |   131 Sa11y   |   28 contrast   |   16 reading level   |   all passing, every build</a:t>
             </a:r>
             <a:endParaRPr lang="en-US" sz="1200" dirty="0"/>
           </a:p>
@@ -19134,7 +19134,7 @@
                 <a:ea typeface="Courier New" pitchFamily="34" charset="-122"/>
                 <a:cs typeface="Courier New" pitchFamily="34" charset="-120"/>
               </a:rPr>
-              <a:t>137</a:t>
+              <a:t>127</a:t>
             </a:r>
             <a:endParaRPr lang="en-US" sz="1600" dirty="0"/>
           </a:p>

--- a/submission/Curb-Cut.pptx
+++ b/submission/Curb-Cut.pptx
@@ -19276,7 +19276,7 @@
                 <a:ea typeface="Courier New" pitchFamily="34" charset="-122"/>
                 <a:cs typeface="Courier New" pitchFamily="34" charset="-120"/>
               </a:rPr>
-              <a:t>331</a:t>
+              <a:t>530</a:t>
             </a:r>
             <a:endParaRPr lang="en-US" sz="1600" dirty="0"/>
           </a:p>
